--- a/outputs/pie-investor-deck.pptx
+++ b/outputs/pie-investor-deck.pptx
@@ -9701,38 +9701,16 @@
           </a:p>
         </p:txBody>
       </p:sp>
-      <p:cxnSp>
-        <p:nvCxnSpPr>
-          <p:cNvPr id="50" name="Connector 49"/>
-          <p:cNvCxnSpPr/>
-          <p:nvPr/>
-        </p:nvCxnSpPr>
-        <p:spPr>
-          <a:xfrm>
-            <a:off x="5867247" y="1892807"/>
-            <a:ext cx="0" cy="3063241"/>
-          </a:xfrm>
-          <a:prstGeom prst="line">
-            <a:avLst/>
-          </a:prstGeom>
-          <a:ln w="9525">
-            <a:solidFill>
-              <a:srgbClr val="A8A69E"/>
-            </a:solidFill>
-          </a:ln>
-          <a:effectLst/>
-        </p:spPr>
-      </p:cxnSp>
-      <p:sp>
-        <p:nvSpPr>
-          <p:cNvPr id="51" name="TextBox 50"/>
+      <p:sp>
+        <p:nvSpPr>
+          <p:cNvPr id="50" name="TextBox 49"/>
           <p:cNvSpPr txBox="1"/>
           <p:nvPr/>
         </p:nvSpPr>
         <p:spPr>
           <a:xfrm>
-            <a:off x="914400" y="1929384"/>
-            <a:ext cx="3657600" cy="219456"/>
+            <a:off x="914400" y="1938527"/>
+            <a:ext cx="4572000" cy="219456"/>
           </a:xfrm>
           <a:prstGeom prst="rect">
             <a:avLst/>
@@ -9751,7 +9729,1193 @@
               </a:lnSpc>
             </a:pPr>
             <a:r>
-              <a:rPr sz="950" b="0" spc="90">
+              <a:rPr sz="900" b="0" spc="90">
+                <a:solidFill>
+                  <a:srgbClr val="A8A69E"/>
+                </a:solidFill>
+                <a:latin typeface="IBM Plex Mono"/>
+              </a:rPr>
+              <a:t>WHO — THE SCREEN</a:t>
+            </a:r>
+          </a:p>
+        </p:txBody>
+      </p:sp>
+      <p:sp>
+        <p:nvSpPr>
+          <p:cNvPr id="51" name="Rectangle 50"/>
+          <p:cNvSpPr/>
+          <p:nvPr/>
+        </p:nvSpPr>
+        <p:spPr>
+          <a:xfrm>
+            <a:off x="914400" y="2157983"/>
+            <a:ext cx="1589989" cy="420624"/>
+          </a:xfrm>
+          <a:prstGeom prst="rect">
+            <a:avLst/>
+          </a:prstGeom>
+          <a:noFill/>
+          <a:ln w="9525">
+            <a:solidFill>
+              <a:srgbClr val="1B4D7A"/>
+            </a:solidFill>
+          </a:ln>
+          <a:effectLst/>
+        </p:spPr>
+        <p:txBody>
+          <a:bodyPr rtlCol="0" anchor="ctr"/>
+          <a:lstStyle/>
+          <a:p>
+            <a:pPr algn="ctr"/>
+          </a:p>
+        </p:txBody>
+      </p:sp>
+      <p:sp>
+        <p:nvSpPr>
+          <p:cNvPr id="52" name="TextBox 51"/>
+          <p:cNvSpPr txBox="1"/>
+          <p:nvPr/>
+        </p:nvSpPr>
+        <p:spPr>
+          <a:xfrm>
+            <a:off x="978408" y="2203703"/>
+            <a:ext cx="1461973" cy="329184"/>
+          </a:xfrm>
+          <a:prstGeom prst="rect">
+            <a:avLst/>
+          </a:prstGeom>
+          <a:noFill/>
+        </p:spPr>
+        <p:txBody>
+          <a:bodyPr wrap="square" anchor="ctr" lIns="0" rIns="0" tIns="0" bIns="0">
+            <a:spAutoFit/>
+          </a:bodyPr>
+          <a:lstStyle/>
+          <a:p>
+            <a:pPr algn="ctr">
+              <a:lnSpc>
+                <a:spcPct val="112000"/>
+              </a:lnSpc>
+            </a:pPr>
+            <a:r>
+              <a:rPr sz="800" b="0">
+                <a:solidFill>
+                  <a:srgbClr val="313337"/>
+                </a:solidFill>
+                <a:latin typeface="IBM Plex Mono"/>
+              </a:rPr>
+              <a:t>&gt; 5,000 SKUs</a:t>
+            </a:r>
+          </a:p>
+        </p:txBody>
+      </p:sp>
+      <p:sp>
+        <p:nvSpPr>
+          <p:cNvPr id="53" name="Rectangle 52"/>
+          <p:cNvSpPr/>
+          <p:nvPr/>
+        </p:nvSpPr>
+        <p:spPr>
+          <a:xfrm>
+            <a:off x="2668981" y="2157983"/>
+            <a:ext cx="1589989" cy="420624"/>
+          </a:xfrm>
+          <a:prstGeom prst="rect">
+            <a:avLst/>
+          </a:prstGeom>
+          <a:noFill/>
+          <a:ln w="9525">
+            <a:solidFill>
+              <a:srgbClr val="1B4D7A"/>
+            </a:solidFill>
+          </a:ln>
+          <a:effectLst/>
+        </p:spPr>
+        <p:txBody>
+          <a:bodyPr rtlCol="0" anchor="ctr"/>
+          <a:lstStyle/>
+          <a:p>
+            <a:pPr algn="ctr"/>
+          </a:p>
+        </p:txBody>
+      </p:sp>
+      <p:sp>
+        <p:nvSpPr>
+          <p:cNvPr id="54" name="TextBox 53"/>
+          <p:cNvSpPr txBox="1"/>
+          <p:nvPr/>
+        </p:nvSpPr>
+        <p:spPr>
+          <a:xfrm>
+            <a:off x="2732989" y="2203703"/>
+            <a:ext cx="1461973" cy="329184"/>
+          </a:xfrm>
+          <a:prstGeom prst="rect">
+            <a:avLst/>
+          </a:prstGeom>
+          <a:noFill/>
+        </p:spPr>
+        <p:txBody>
+          <a:bodyPr wrap="square" anchor="ctr" lIns="0" rIns="0" tIns="0" bIns="0">
+            <a:spAutoFit/>
+          </a:bodyPr>
+          <a:lstStyle/>
+          <a:p>
+            <a:pPr algn="ctr">
+              <a:lnSpc>
+                <a:spcPct val="112000"/>
+              </a:lnSpc>
+            </a:pPr>
+            <a:r>
+              <a:rPr sz="800" b="0">
+                <a:solidFill>
+                  <a:srgbClr val="313337"/>
+                </a:solidFill>
+                <a:latin typeface="IBM Plex Mono"/>
+              </a:rPr>
+              <a:t>Encoded geometry</a:t>
+            </a:r>
+          </a:p>
+        </p:txBody>
+      </p:sp>
+      <p:sp>
+        <p:nvSpPr>
+          <p:cNvPr id="55" name="Rectangle 54"/>
+          <p:cNvSpPr/>
+          <p:nvPr/>
+        </p:nvSpPr>
+        <p:spPr>
+          <a:xfrm>
+            <a:off x="4423562" y="2157983"/>
+            <a:ext cx="1589989" cy="420624"/>
+          </a:xfrm>
+          <a:prstGeom prst="rect">
+            <a:avLst/>
+          </a:prstGeom>
+          <a:noFill/>
+          <a:ln w="9525">
+            <a:solidFill>
+              <a:srgbClr val="1B4D7A"/>
+            </a:solidFill>
+          </a:ln>
+          <a:effectLst/>
+        </p:spPr>
+        <p:txBody>
+          <a:bodyPr rtlCol="0" anchor="ctr"/>
+          <a:lstStyle/>
+          <a:p>
+            <a:pPr algn="ctr"/>
+          </a:p>
+        </p:txBody>
+      </p:sp>
+      <p:sp>
+        <p:nvSpPr>
+          <p:cNvPr id="56" name="TextBox 55"/>
+          <p:cNvSpPr txBox="1"/>
+          <p:nvPr/>
+        </p:nvSpPr>
+        <p:spPr>
+          <a:xfrm>
+            <a:off x="4487570" y="2203703"/>
+            <a:ext cx="1461973" cy="329184"/>
+          </a:xfrm>
+          <a:prstGeom prst="rect">
+            <a:avLst/>
+          </a:prstGeom>
+          <a:noFill/>
+        </p:spPr>
+        <p:txBody>
+          <a:bodyPr wrap="square" anchor="ctr" lIns="0" rIns="0" tIns="0" bIns="0">
+            <a:spAutoFit/>
+          </a:bodyPr>
+          <a:lstStyle/>
+          <a:p>
+            <a:pPr algn="ctr">
+              <a:lnSpc>
+                <a:spcPct val="112000"/>
+              </a:lnSpc>
+            </a:pPr>
+            <a:r>
+              <a:rPr sz="800" b="0">
+                <a:solidFill>
+                  <a:srgbClr val="313337"/>
+                </a:solidFill>
+                <a:latin typeface="IBM Plex Mono"/>
+              </a:rPr>
+              <a:t>&gt; 150 lines/month</a:t>
+            </a:r>
+          </a:p>
+        </p:txBody>
+      </p:sp>
+      <p:sp>
+        <p:nvSpPr>
+          <p:cNvPr id="57" name="Rectangle 56"/>
+          <p:cNvSpPr/>
+          <p:nvPr/>
+        </p:nvSpPr>
+        <p:spPr>
+          <a:xfrm>
+            <a:off x="6178143" y="2157983"/>
+            <a:ext cx="1589989" cy="420624"/>
+          </a:xfrm>
+          <a:prstGeom prst="rect">
+            <a:avLst/>
+          </a:prstGeom>
+          <a:noFill/>
+          <a:ln w="9525">
+            <a:solidFill>
+              <a:srgbClr val="1B4D7A"/>
+            </a:solidFill>
+          </a:ln>
+          <a:effectLst/>
+        </p:spPr>
+        <p:txBody>
+          <a:bodyPr rtlCol="0" anchor="ctr"/>
+          <a:lstStyle/>
+          <a:p>
+            <a:pPr algn="ctr"/>
+          </a:p>
+        </p:txBody>
+      </p:sp>
+      <p:sp>
+        <p:nvSpPr>
+          <p:cNvPr id="58" name="TextBox 57"/>
+          <p:cNvSpPr txBox="1"/>
+          <p:nvPr/>
+        </p:nvSpPr>
+        <p:spPr>
+          <a:xfrm>
+            <a:off x="6242151" y="2203703"/>
+            <a:ext cx="1461973" cy="329184"/>
+          </a:xfrm>
+          <a:prstGeom prst="rect">
+            <a:avLst/>
+          </a:prstGeom>
+          <a:noFill/>
+        </p:spPr>
+        <p:txBody>
+          <a:bodyPr wrap="square" anchor="ctr" lIns="0" rIns="0" tIns="0" bIns="0">
+            <a:spAutoFit/>
+          </a:bodyPr>
+          <a:lstStyle/>
+          <a:p>
+            <a:pPr algn="ctr">
+              <a:lnSpc>
+                <a:spcPct val="112000"/>
+              </a:lnSpc>
+            </a:pPr>
+            <a:r>
+              <a:rPr sz="800" b="0">
+                <a:solidFill>
+                  <a:srgbClr val="313337"/>
+                </a:solidFill>
+                <a:latin typeface="IBM Plex Mono"/>
+              </a:rPr>
+              <a:t>Margin &lt; 25%</a:t>
+            </a:r>
+          </a:p>
+        </p:txBody>
+      </p:sp>
+      <p:sp>
+        <p:nvSpPr>
+          <p:cNvPr id="59" name="Rectangle 58"/>
+          <p:cNvSpPr/>
+          <p:nvPr/>
+        </p:nvSpPr>
+        <p:spPr>
+          <a:xfrm>
+            <a:off x="7932724" y="2157983"/>
+            <a:ext cx="1589989" cy="420624"/>
+          </a:xfrm>
+          <a:prstGeom prst="rect">
+            <a:avLst/>
+          </a:prstGeom>
+          <a:noFill/>
+          <a:ln w="9525">
+            <a:solidFill>
+              <a:srgbClr val="1B4D7A"/>
+            </a:solidFill>
+          </a:ln>
+          <a:effectLst/>
+        </p:spPr>
+        <p:txBody>
+          <a:bodyPr rtlCol="0" anchor="ctr"/>
+          <a:lstStyle/>
+          <a:p>
+            <a:pPr algn="ctr"/>
+          </a:p>
+        </p:txBody>
+      </p:sp>
+      <p:sp>
+        <p:nvSpPr>
+          <p:cNvPr id="60" name="TextBox 59"/>
+          <p:cNvSpPr txBox="1"/>
+          <p:nvPr/>
+        </p:nvSpPr>
+        <p:spPr>
+          <a:xfrm>
+            <a:off x="7996732" y="2203703"/>
+            <a:ext cx="1461973" cy="329184"/>
+          </a:xfrm>
+          <a:prstGeom prst="rect">
+            <a:avLst/>
+          </a:prstGeom>
+          <a:noFill/>
+        </p:spPr>
+        <p:txBody>
+          <a:bodyPr wrap="square" anchor="ctr" lIns="0" rIns="0" tIns="0" bIns="0">
+            <a:spAutoFit/>
+          </a:bodyPr>
+          <a:lstStyle/>
+          <a:p>
+            <a:pPr algn="ctr">
+              <a:lnSpc>
+                <a:spcPct val="112000"/>
+              </a:lnSpc>
+            </a:pPr>
+            <a:r>
+              <a:rPr sz="800" b="0">
+                <a:solidFill>
+                  <a:srgbClr val="313337"/>
+                </a:solidFill>
+                <a:latin typeface="IBM Plex Mono"/>
+              </a:rPr>
+              <a:t>3–30 quoting</a:t>
+            </a:r>
+          </a:p>
+        </p:txBody>
+      </p:sp>
+      <p:sp>
+        <p:nvSpPr>
+          <p:cNvPr id="61" name="Rectangle 60"/>
+          <p:cNvSpPr/>
+          <p:nvPr/>
+        </p:nvSpPr>
+        <p:spPr>
+          <a:xfrm>
+            <a:off x="9687306" y="2157983"/>
+            <a:ext cx="1589989" cy="420624"/>
+          </a:xfrm>
+          <a:prstGeom prst="rect">
+            <a:avLst/>
+          </a:prstGeom>
+          <a:noFill/>
+          <a:ln w="9525">
+            <a:solidFill>
+              <a:srgbClr val="1B4D7A"/>
+            </a:solidFill>
+          </a:ln>
+          <a:effectLst/>
+        </p:spPr>
+        <p:txBody>
+          <a:bodyPr rtlCol="0" anchor="ctr"/>
+          <a:lstStyle/>
+          <a:p>
+            <a:pPr algn="ctr"/>
+          </a:p>
+        </p:txBody>
+      </p:sp>
+      <p:sp>
+        <p:nvSpPr>
+          <p:cNvPr id="62" name="TextBox 61"/>
+          <p:cNvSpPr txBox="1"/>
+          <p:nvPr/>
+        </p:nvSpPr>
+        <p:spPr>
+          <a:xfrm>
+            <a:off x="9751314" y="2203703"/>
+            <a:ext cx="1461973" cy="329184"/>
+          </a:xfrm>
+          <a:prstGeom prst="rect">
+            <a:avLst/>
+          </a:prstGeom>
+          <a:noFill/>
+        </p:spPr>
+        <p:txBody>
+          <a:bodyPr wrap="square" anchor="ctr" lIns="0" rIns="0" tIns="0" bIns="0">
+            <a:spAutoFit/>
+          </a:bodyPr>
+          <a:lstStyle/>
+          <a:p>
+            <a:pPr algn="ctr">
+              <a:lnSpc>
+                <a:spcPct val="112000"/>
+              </a:lnSpc>
+            </a:pPr>
+            <a:r>
+              <a:rPr sz="800" b="0">
+                <a:solidFill>
+                  <a:srgbClr val="313337"/>
+                </a:solidFill>
+                <a:latin typeface="IBM Plex Mono"/>
+              </a:rPr>
+              <a:t>Connector ERP</a:t>
+            </a:r>
+          </a:p>
+        </p:txBody>
+      </p:sp>
+      <p:sp>
+        <p:nvSpPr>
+          <p:cNvPr id="63" name="TextBox 62"/>
+          <p:cNvSpPr txBox="1"/>
+          <p:nvPr/>
+        </p:nvSpPr>
+        <p:spPr>
+          <a:xfrm>
+            <a:off x="914400" y="2788920"/>
+            <a:ext cx="4572000" cy="219456"/>
+          </a:xfrm>
+          <a:prstGeom prst="rect">
+            <a:avLst/>
+          </a:prstGeom>
+          <a:noFill/>
+        </p:spPr>
+        <p:txBody>
+          <a:bodyPr wrap="square" anchor="t" lIns="0" rIns="0" tIns="0" bIns="0">
+            <a:spAutoFit/>
+          </a:bodyPr>
+          <a:lstStyle/>
+          <a:p>
+            <a:pPr algn="l">
+              <a:lnSpc>
+                <a:spcPct val="100000"/>
+              </a:lnSpc>
+            </a:pPr>
+            <a:r>
+              <a:rPr sz="900" b="0" spc="90">
+                <a:solidFill>
+                  <a:srgbClr val="A8A69E"/>
+                </a:solidFill>
+                <a:latin typeface="IBM Plex Mono"/>
+              </a:rPr>
+              <a:t>HOW IT LANDS</a:t>
+            </a:r>
+          </a:p>
+        </p:txBody>
+      </p:sp>
+      <p:sp>
+        <p:nvSpPr>
+          <p:cNvPr id="64" name="TextBox 63"/>
+          <p:cNvSpPr txBox="1"/>
+          <p:nvPr/>
+        </p:nvSpPr>
+        <p:spPr>
+          <a:xfrm>
+            <a:off x="914400" y="3026663"/>
+            <a:ext cx="10362895" cy="310896"/>
+          </a:xfrm>
+          <a:prstGeom prst="rect">
+            <a:avLst/>
+          </a:prstGeom>
+          <a:noFill/>
+        </p:spPr>
+        <p:txBody>
+          <a:bodyPr wrap="square" anchor="t" lIns="0" rIns="0" tIns="0" bIns="0">
+            <a:spAutoFit/>
+          </a:bodyPr>
+          <a:lstStyle/>
+          <a:p>
+            <a:pPr algn="l">
+              <a:lnSpc>
+                <a:spcPct val="115000"/>
+              </a:lnSpc>
+            </a:pPr>
+            <a:r>
+              <a:rPr sz="1350" b="0">
+                <a:solidFill>
+                  <a:srgbClr val="313337"/>
+                </a:solidFill>
+                <a:latin typeface="IBM Plex Sans"/>
+              </a:rPr>
+              <a:t>Founder-led. Owner or sales head, triggered by a price increase or a departing expert. Diagnostic before demo.</a:t>
+            </a:r>
+          </a:p>
+        </p:txBody>
+      </p:sp>
+      <p:sp>
+        <p:nvSpPr>
+          <p:cNvPr id="65" name="TextBox 64"/>
+          <p:cNvSpPr txBox="1"/>
+          <p:nvPr/>
+        </p:nvSpPr>
+        <p:spPr>
+          <a:xfrm>
+            <a:off x="914400" y="3483863"/>
+            <a:ext cx="4572000" cy="219456"/>
+          </a:xfrm>
+          <a:prstGeom prst="rect">
+            <a:avLst/>
+          </a:prstGeom>
+          <a:noFill/>
+        </p:spPr>
+        <p:txBody>
+          <a:bodyPr wrap="square" anchor="t" lIns="0" rIns="0" tIns="0" bIns="0">
+            <a:spAutoFit/>
+          </a:bodyPr>
+          <a:lstStyle/>
+          <a:p>
+            <a:pPr algn="l">
+              <a:lnSpc>
+                <a:spcPct val="100000"/>
+              </a:lnSpc>
+            </a:pPr>
+            <a:r>
+              <a:rPr sz="900" b="0" spc="90">
+                <a:solidFill>
+                  <a:srgbClr val="A8A69E"/>
+                </a:solidFill>
+                <a:latin typeface="IBM Plex Mono"/>
+              </a:rPr>
+              <a:t>HOW IT GROWS</a:t>
+            </a:r>
+          </a:p>
+        </p:txBody>
+      </p:sp>
+      <p:sp>
+        <p:nvSpPr>
+          <p:cNvPr id="66" name="Rectangle 65"/>
+          <p:cNvSpPr/>
+          <p:nvPr/>
+        </p:nvSpPr>
+        <p:spPr>
+          <a:xfrm>
+            <a:off x="914400" y="3703320"/>
+            <a:ext cx="1529029" cy="512064"/>
+          </a:xfrm>
+          <a:prstGeom prst="rect">
+            <a:avLst/>
+          </a:prstGeom>
+          <a:noFill/>
+          <a:ln w="19050">
+            <a:solidFill>
+              <a:srgbClr val="1B4D7A"/>
+            </a:solidFill>
+          </a:ln>
+          <a:effectLst/>
+        </p:spPr>
+        <p:txBody>
+          <a:bodyPr rtlCol="0" anchor="ctr"/>
+          <a:lstStyle/>
+          <a:p>
+            <a:pPr algn="ctr"/>
+          </a:p>
+        </p:txBody>
+      </p:sp>
+      <p:sp>
+        <p:nvSpPr>
+          <p:cNvPr id="67" name="TextBox 66"/>
+          <p:cNvSpPr txBox="1"/>
+          <p:nvPr/>
+        </p:nvSpPr>
+        <p:spPr>
+          <a:xfrm>
+            <a:off x="978408" y="3749039"/>
+            <a:ext cx="1401013" cy="420624"/>
+          </a:xfrm>
+          <a:prstGeom prst="rect">
+            <a:avLst/>
+          </a:prstGeom>
+          <a:noFill/>
+        </p:spPr>
+        <p:txBody>
+          <a:bodyPr wrap="square" anchor="ctr" lIns="0" rIns="0" tIns="0" bIns="0">
+            <a:spAutoFit/>
+          </a:bodyPr>
+          <a:lstStyle/>
+          <a:p>
+            <a:pPr algn="ctr">
+              <a:lnSpc>
+                <a:spcPct val="112000"/>
+              </a:lnSpc>
+            </a:pPr>
+            <a:r>
+              <a:rPr sz="800" b="0">
+                <a:solidFill>
+                  <a:srgbClr val="1B4D7A"/>
+                </a:solidFill>
+                <a:latin typeface="IBM Plex Mono"/>
+              </a:rPr>
+              <a:t>Quote Desk</a:t>
+            </a:r>
+          </a:p>
+        </p:txBody>
+      </p:sp>
+      <p:cxnSp>
+        <p:nvCxnSpPr>
+          <p:cNvPr id="68" name="Connector 67"/>
+          <p:cNvCxnSpPr/>
+          <p:nvPr/>
+        </p:nvCxnSpPr>
+        <p:spPr>
+          <a:xfrm>
+            <a:off x="2443429" y="3959352"/>
+            <a:ext cx="237744" cy="0"/>
+          </a:xfrm>
+          <a:prstGeom prst="line">
+            <a:avLst/>
+          </a:prstGeom>
+          <a:ln w="9525">
+            <a:solidFill>
+              <a:srgbClr val="1B4D7A"/>
+            </a:solidFill>
+            <a:tailEnd type="triangle" w="med" len="med"/>
+          </a:ln>
+          <a:effectLst/>
+        </p:spPr>
+      </p:cxnSp>
+      <p:sp>
+        <p:nvSpPr>
+          <p:cNvPr id="69" name="Rectangle 68"/>
+          <p:cNvSpPr/>
+          <p:nvPr/>
+        </p:nvSpPr>
+        <p:spPr>
+          <a:xfrm>
+            <a:off x="2681173" y="3703320"/>
+            <a:ext cx="1529029" cy="512064"/>
+          </a:xfrm>
+          <a:prstGeom prst="rect">
+            <a:avLst/>
+          </a:prstGeom>
+          <a:noFill/>
+          <a:ln w="7620">
+            <a:solidFill>
+              <a:srgbClr val="1B4D7A"/>
+            </a:solidFill>
+          </a:ln>
+          <a:effectLst/>
+        </p:spPr>
+        <p:txBody>
+          <a:bodyPr rtlCol="0" anchor="ctr"/>
+          <a:lstStyle/>
+          <a:p>
+            <a:pPr algn="ctr"/>
+          </a:p>
+        </p:txBody>
+      </p:sp>
+      <p:sp>
+        <p:nvSpPr>
+          <p:cNvPr id="70" name="TextBox 69"/>
+          <p:cNvSpPr txBox="1"/>
+          <p:nvPr/>
+        </p:nvSpPr>
+        <p:spPr>
+          <a:xfrm>
+            <a:off x="2745181" y="3749039"/>
+            <a:ext cx="1401013" cy="420624"/>
+          </a:xfrm>
+          <a:prstGeom prst="rect">
+            <a:avLst/>
+          </a:prstGeom>
+          <a:noFill/>
+        </p:spPr>
+        <p:txBody>
+          <a:bodyPr wrap="square" anchor="ctr" lIns="0" rIns="0" tIns="0" bIns="0">
+            <a:spAutoFit/>
+          </a:bodyPr>
+          <a:lstStyle/>
+          <a:p>
+            <a:pPr algn="ctr">
+              <a:lnSpc>
+                <a:spcPct val="112000"/>
+              </a:lnSpc>
+            </a:pPr>
+            <a:r>
+              <a:rPr sz="800" b="0">
+                <a:solidFill>
+                  <a:srgbClr val="313337"/>
+                </a:solidFill>
+                <a:latin typeface="IBM Plex Mono"/>
+              </a:rPr>
+              <a:t>Product</a:t>
+            </a:r>
+          </a:p>
+          <a:p>
+            <a:pPr algn="ctr">
+              <a:lnSpc>
+                <a:spcPct val="112000"/>
+              </a:lnSpc>
+            </a:pPr>
+            <a:r>
+              <a:rPr sz="800" b="0">
+                <a:solidFill>
+                  <a:srgbClr val="313337"/>
+                </a:solidFill>
+                <a:latin typeface="IBM Plex Mono"/>
+              </a:rPr>
+              <a:t>Intelligence</a:t>
+            </a:r>
+          </a:p>
+        </p:txBody>
+      </p:sp>
+      <p:cxnSp>
+        <p:nvCxnSpPr>
+          <p:cNvPr id="71" name="Connector 70"/>
+          <p:cNvCxnSpPr/>
+          <p:nvPr/>
+        </p:nvCxnSpPr>
+        <p:spPr>
+          <a:xfrm>
+            <a:off x="4210202" y="3959352"/>
+            <a:ext cx="237744" cy="0"/>
+          </a:xfrm>
+          <a:prstGeom prst="line">
+            <a:avLst/>
+          </a:prstGeom>
+          <a:ln w="9525">
+            <a:solidFill>
+              <a:srgbClr val="1B4D7A"/>
+            </a:solidFill>
+            <a:tailEnd type="triangle" w="med" len="med"/>
+          </a:ln>
+          <a:effectLst/>
+        </p:spPr>
+      </p:cxnSp>
+      <p:sp>
+        <p:nvSpPr>
+          <p:cNvPr id="72" name="Rectangle 71"/>
+          <p:cNvSpPr/>
+          <p:nvPr/>
+        </p:nvSpPr>
+        <p:spPr>
+          <a:xfrm>
+            <a:off x="4447946" y="3703320"/>
+            <a:ext cx="1529029" cy="512064"/>
+          </a:xfrm>
+          <a:prstGeom prst="rect">
+            <a:avLst/>
+          </a:prstGeom>
+          <a:noFill/>
+          <a:ln w="7620">
+            <a:solidFill>
+              <a:srgbClr val="1B4D7A"/>
+            </a:solidFill>
+          </a:ln>
+          <a:effectLst/>
+        </p:spPr>
+        <p:txBody>
+          <a:bodyPr rtlCol="0" anchor="ctr"/>
+          <a:lstStyle/>
+          <a:p>
+            <a:pPr algn="ctr"/>
+          </a:p>
+        </p:txBody>
+      </p:sp>
+      <p:sp>
+        <p:nvSpPr>
+          <p:cNvPr id="73" name="TextBox 72"/>
+          <p:cNvSpPr txBox="1"/>
+          <p:nvPr/>
+        </p:nvSpPr>
+        <p:spPr>
+          <a:xfrm>
+            <a:off x="4511954" y="3749039"/>
+            <a:ext cx="1401013" cy="420624"/>
+          </a:xfrm>
+          <a:prstGeom prst="rect">
+            <a:avLst/>
+          </a:prstGeom>
+          <a:noFill/>
+        </p:spPr>
+        <p:txBody>
+          <a:bodyPr wrap="square" anchor="ctr" lIns="0" rIns="0" tIns="0" bIns="0">
+            <a:spAutoFit/>
+          </a:bodyPr>
+          <a:lstStyle/>
+          <a:p>
+            <a:pPr algn="ctr">
+              <a:lnSpc>
+                <a:spcPct val="112000"/>
+              </a:lnSpc>
+            </a:pPr>
+            <a:r>
+              <a:rPr sz="800" b="0">
+                <a:solidFill>
+                  <a:srgbClr val="313337"/>
+                </a:solidFill>
+                <a:latin typeface="IBM Plex Mono"/>
+              </a:rPr>
+              <a:t>Pricing</a:t>
+            </a:r>
+          </a:p>
+        </p:txBody>
+      </p:sp>
+      <p:cxnSp>
+        <p:nvCxnSpPr>
+          <p:cNvPr id="74" name="Connector 73"/>
+          <p:cNvCxnSpPr/>
+          <p:nvPr/>
+        </p:nvCxnSpPr>
+        <p:spPr>
+          <a:xfrm>
+            <a:off x="5976975" y="3959352"/>
+            <a:ext cx="237744" cy="0"/>
+          </a:xfrm>
+          <a:prstGeom prst="line">
+            <a:avLst/>
+          </a:prstGeom>
+          <a:ln w="9525">
+            <a:solidFill>
+              <a:srgbClr val="1B4D7A"/>
+            </a:solidFill>
+            <a:tailEnd type="triangle" w="med" len="med"/>
+          </a:ln>
+          <a:effectLst/>
+        </p:spPr>
+      </p:cxnSp>
+      <p:sp>
+        <p:nvSpPr>
+          <p:cNvPr id="75" name="Rectangle 74"/>
+          <p:cNvSpPr/>
+          <p:nvPr/>
+        </p:nvSpPr>
+        <p:spPr>
+          <a:xfrm>
+            <a:off x="6214719" y="3703320"/>
+            <a:ext cx="1529029" cy="512064"/>
+          </a:xfrm>
+          <a:prstGeom prst="rect">
+            <a:avLst/>
+          </a:prstGeom>
+          <a:noFill/>
+          <a:ln w="7620">
+            <a:solidFill>
+              <a:srgbClr val="1B4D7A"/>
+            </a:solidFill>
+          </a:ln>
+          <a:effectLst/>
+        </p:spPr>
+        <p:txBody>
+          <a:bodyPr rtlCol="0" anchor="ctr"/>
+          <a:lstStyle/>
+          <a:p>
+            <a:pPr algn="ctr"/>
+          </a:p>
+        </p:txBody>
+      </p:sp>
+      <p:sp>
+        <p:nvSpPr>
+          <p:cNvPr id="76" name="TextBox 75"/>
+          <p:cNvSpPr txBox="1"/>
+          <p:nvPr/>
+        </p:nvSpPr>
+        <p:spPr>
+          <a:xfrm>
+            <a:off x="6278727" y="3749039"/>
+            <a:ext cx="1401013" cy="420624"/>
+          </a:xfrm>
+          <a:prstGeom prst="rect">
+            <a:avLst/>
+          </a:prstGeom>
+          <a:noFill/>
+        </p:spPr>
+        <p:txBody>
+          <a:bodyPr wrap="square" anchor="ctr" lIns="0" rIns="0" tIns="0" bIns="0">
+            <a:spAutoFit/>
+          </a:bodyPr>
+          <a:lstStyle/>
+          <a:p>
+            <a:pPr algn="ctr">
+              <a:lnSpc>
+                <a:spcPct val="112000"/>
+              </a:lnSpc>
+            </a:pPr>
+            <a:r>
+              <a:rPr sz="800" b="0">
+                <a:solidFill>
+                  <a:srgbClr val="313337"/>
+                </a:solidFill>
+                <a:latin typeface="IBM Plex Mono"/>
+              </a:rPr>
+              <a:t>Margin</a:t>
+            </a:r>
+          </a:p>
+          <a:p>
+            <a:pPr algn="ctr">
+              <a:lnSpc>
+                <a:spcPct val="112000"/>
+              </a:lnSpc>
+            </a:pPr>
+            <a:r>
+              <a:rPr sz="800" b="0">
+                <a:solidFill>
+                  <a:srgbClr val="313337"/>
+                </a:solidFill>
+                <a:latin typeface="IBM Plex Mono"/>
+              </a:rPr>
+              <a:t>Management</a:t>
+            </a:r>
+          </a:p>
+        </p:txBody>
+      </p:sp>
+      <p:cxnSp>
+        <p:nvCxnSpPr>
+          <p:cNvPr id="77" name="Connector 76"/>
+          <p:cNvCxnSpPr/>
+          <p:nvPr/>
+        </p:nvCxnSpPr>
+        <p:spPr>
+          <a:xfrm>
+            <a:off x="7743748" y="3959352"/>
+            <a:ext cx="237744" cy="0"/>
+          </a:xfrm>
+          <a:prstGeom prst="line">
+            <a:avLst/>
+          </a:prstGeom>
+          <a:ln w="9525">
+            <a:solidFill>
+              <a:srgbClr val="1B4D7A"/>
+            </a:solidFill>
+            <a:tailEnd type="triangle" w="med" len="med"/>
+          </a:ln>
+          <a:effectLst/>
+        </p:spPr>
+      </p:cxnSp>
+      <p:sp>
+        <p:nvSpPr>
+          <p:cNvPr id="78" name="Rectangle 77"/>
+          <p:cNvSpPr/>
+          <p:nvPr/>
+        </p:nvSpPr>
+        <p:spPr>
+          <a:xfrm>
+            <a:off x="7981492" y="3703320"/>
+            <a:ext cx="1529029" cy="512064"/>
+          </a:xfrm>
+          <a:prstGeom prst="rect">
+            <a:avLst/>
+          </a:prstGeom>
+          <a:noFill/>
+          <a:ln w="7620">
+            <a:solidFill>
+              <a:srgbClr val="1B4D7A"/>
+            </a:solidFill>
+          </a:ln>
+          <a:effectLst/>
+        </p:spPr>
+        <p:txBody>
+          <a:bodyPr rtlCol="0" anchor="ctr"/>
+          <a:lstStyle/>
+          <a:p>
+            <a:pPr algn="ctr"/>
+          </a:p>
+        </p:txBody>
+      </p:sp>
+      <p:sp>
+        <p:nvSpPr>
+          <p:cNvPr id="79" name="TextBox 78"/>
+          <p:cNvSpPr txBox="1"/>
+          <p:nvPr/>
+        </p:nvSpPr>
+        <p:spPr>
+          <a:xfrm>
+            <a:off x="8045500" y="3749039"/>
+            <a:ext cx="1401013" cy="420624"/>
+          </a:xfrm>
+          <a:prstGeom prst="rect">
+            <a:avLst/>
+          </a:prstGeom>
+          <a:noFill/>
+        </p:spPr>
+        <p:txBody>
+          <a:bodyPr wrap="square" anchor="ctr" lIns="0" rIns="0" tIns="0" bIns="0">
+            <a:spAutoFit/>
+          </a:bodyPr>
+          <a:lstStyle/>
+          <a:p>
+            <a:pPr algn="ctr">
+              <a:lnSpc>
+                <a:spcPct val="112000"/>
+              </a:lnSpc>
+            </a:pPr>
+            <a:r>
+              <a:rPr sz="800" b="0">
+                <a:solidFill>
+                  <a:srgbClr val="313337"/>
+                </a:solidFill>
+                <a:latin typeface="IBM Plex Mono"/>
+              </a:rPr>
+              <a:t>Agents</a:t>
+            </a:r>
+          </a:p>
+        </p:txBody>
+      </p:sp>
+      <p:cxnSp>
+        <p:nvCxnSpPr>
+          <p:cNvPr id="80" name="Connector 79"/>
+          <p:cNvCxnSpPr/>
+          <p:nvPr/>
+        </p:nvCxnSpPr>
+        <p:spPr>
+          <a:xfrm>
+            <a:off x="9510521" y="3959352"/>
+            <a:ext cx="237744" cy="0"/>
+          </a:xfrm>
+          <a:prstGeom prst="line">
+            <a:avLst/>
+          </a:prstGeom>
+          <a:ln w="9525">
+            <a:solidFill>
+              <a:srgbClr val="1B4D7A"/>
+            </a:solidFill>
+            <a:tailEnd type="triangle" w="med" len="med"/>
+          </a:ln>
+          <a:effectLst/>
+        </p:spPr>
+      </p:cxnSp>
+      <p:sp>
+        <p:nvSpPr>
+          <p:cNvPr id="81" name="Rectangle 80"/>
+          <p:cNvSpPr/>
+          <p:nvPr/>
+        </p:nvSpPr>
+        <p:spPr>
+          <a:xfrm>
+            <a:off x="9748266" y="3703320"/>
+            <a:ext cx="1529029" cy="512064"/>
+          </a:xfrm>
+          <a:prstGeom prst="rect">
+            <a:avLst/>
+          </a:prstGeom>
+          <a:noFill/>
+          <a:ln w="7620">
+            <a:solidFill>
+              <a:srgbClr val="1B4D7A"/>
+            </a:solidFill>
+          </a:ln>
+          <a:effectLst/>
+        </p:spPr>
+        <p:txBody>
+          <a:bodyPr rtlCol="0" anchor="ctr"/>
+          <a:lstStyle/>
+          <a:p>
+            <a:pPr algn="ctr"/>
+          </a:p>
+        </p:txBody>
+      </p:sp>
+      <p:sp>
+        <p:nvSpPr>
+          <p:cNvPr id="82" name="TextBox 81"/>
+          <p:cNvSpPr txBox="1"/>
+          <p:nvPr/>
+        </p:nvSpPr>
+        <p:spPr>
+          <a:xfrm>
+            <a:off x="9812274" y="3749039"/>
+            <a:ext cx="1401013" cy="420624"/>
+          </a:xfrm>
+          <a:prstGeom prst="rect">
+            <a:avLst/>
+          </a:prstGeom>
+          <a:noFill/>
+        </p:spPr>
+        <p:txBody>
+          <a:bodyPr wrap="square" anchor="ctr" lIns="0" rIns="0" tIns="0" bIns="0">
+            <a:spAutoFit/>
+          </a:bodyPr>
+          <a:lstStyle/>
+          <a:p>
+            <a:pPr algn="ctr">
+              <a:lnSpc>
+                <a:spcPct val="112000"/>
+              </a:lnSpc>
+            </a:pPr>
+            <a:r>
+              <a:rPr sz="800" b="0">
+                <a:solidFill>
+                  <a:srgbClr val="313337"/>
+                </a:solidFill>
+                <a:latin typeface="IBM Plex Mono"/>
+              </a:rPr>
+              <a:t>Commercial</a:t>
+            </a:r>
+          </a:p>
+          <a:p>
+            <a:pPr algn="ctr">
+              <a:lnSpc>
+                <a:spcPct val="112000"/>
+              </a:lnSpc>
+            </a:pPr>
+            <a:r>
+              <a:rPr sz="800" b="0">
+                <a:solidFill>
+                  <a:srgbClr val="313337"/>
+                </a:solidFill>
+                <a:latin typeface="IBM Plex Mono"/>
+              </a:rPr>
+              <a:t>Intelligence</a:t>
+            </a:r>
+          </a:p>
+        </p:txBody>
+      </p:sp>
+      <p:sp>
+        <p:nvSpPr>
+          <p:cNvPr id="83" name="TextBox 82"/>
+          <p:cNvSpPr txBox="1"/>
+          <p:nvPr/>
+        </p:nvSpPr>
+        <p:spPr>
+          <a:xfrm>
+            <a:off x="914400" y="4306824"/>
+            <a:ext cx="10362895" cy="274320"/>
+          </a:xfrm>
+          <a:prstGeom prst="rect">
+            <a:avLst/>
+          </a:prstGeom>
+          <a:noFill/>
+        </p:spPr>
+        <p:txBody>
+          <a:bodyPr wrap="square" anchor="t" lIns="0" rIns="0" tIns="0" bIns="0">
+            <a:spAutoFit/>
+          </a:bodyPr>
+          <a:lstStyle/>
+          <a:p>
+            <a:pPr algn="l">
+              <a:lnSpc>
+                <a:spcPct val="115000"/>
+              </a:lnSpc>
+            </a:pPr>
+            <a:r>
+              <a:rPr sz="1250" b="0">
+                <a:solidFill>
+                  <a:srgbClr val="313337"/>
+                </a:solidFill>
+                <a:latin typeface="IBM Plex Sans"/>
+              </a:rPr>
+              <a:t>Rung one ships free; the paid tier is built, not yet sold.</a:t>
+            </a:r>
+          </a:p>
+        </p:txBody>
+      </p:sp>
+      <p:sp>
+        <p:nvSpPr>
+          <p:cNvPr id="84" name="TextBox 83"/>
+          <p:cNvSpPr txBox="1"/>
+          <p:nvPr/>
+        </p:nvSpPr>
+        <p:spPr>
+          <a:xfrm>
+            <a:off x="914400" y="4892040"/>
+            <a:ext cx="4572000" cy="219456"/>
+          </a:xfrm>
+          <a:prstGeom prst="rect">
+            <a:avLst/>
+          </a:prstGeom>
+          <a:noFill/>
+        </p:spPr>
+        <p:txBody>
+          <a:bodyPr wrap="square" anchor="t" lIns="0" rIns="0" tIns="0" bIns="0">
+            <a:spAutoFit/>
+          </a:bodyPr>
+          <a:lstStyle/>
+          <a:p>
+            <a:pPr algn="l">
+              <a:lnSpc>
+                <a:spcPct val="100000"/>
+              </a:lnSpc>
+            </a:pPr>
+            <a:r>
+              <a:rPr sz="900" b="0" spc="90">
                 <a:solidFill>
                   <a:srgbClr val="A8A69E"/>
                 </a:solidFill>
@@ -9762,16 +10926,38 @@
           </a:p>
         </p:txBody>
       </p:sp>
-      <p:sp>
-        <p:nvSpPr>
-          <p:cNvPr id="52" name="TextBox 51"/>
+      <p:cxnSp>
+        <p:nvCxnSpPr>
+          <p:cNvPr id="85" name="Connector 84"/>
+          <p:cNvCxnSpPr/>
+          <p:nvPr/>
+        </p:nvCxnSpPr>
+        <p:spPr>
+          <a:xfrm>
+            <a:off x="914400" y="5093207"/>
+            <a:ext cx="10362895" cy="0"/>
+          </a:xfrm>
+          <a:prstGeom prst="line">
+            <a:avLst/>
+          </a:prstGeom>
+          <a:ln w="6350">
+            <a:solidFill>
+              <a:srgbClr val="A8A69E"/>
+            </a:solidFill>
+          </a:ln>
+          <a:effectLst/>
+        </p:spPr>
+      </p:cxnSp>
+      <p:sp>
+        <p:nvSpPr>
+          <p:cNvPr id="86" name="TextBox 85"/>
           <p:cNvSpPr txBox="1"/>
           <p:nvPr/>
         </p:nvSpPr>
         <p:spPr>
           <a:xfrm>
-            <a:off x="914400" y="2295144"/>
-            <a:ext cx="4587087" cy="310896"/>
+            <a:off x="914400" y="5202936"/>
+            <a:ext cx="2384983" cy="256032"/>
           </a:xfrm>
           <a:prstGeom prst="rect">
             <a:avLst/>
@@ -9790,27 +10976,27 @@
               </a:lnSpc>
             </a:pPr>
             <a:r>
-              <a:rPr sz="1350" b="0">
+              <a:rPr sz="1250" b="0">
                 <a:solidFill>
                   <a:srgbClr val="313337"/>
                 </a:solidFill>
                 <a:latin typeface="IBM Plex Sans"/>
               </a:rPr>
-              <a:t>Platform subscription per organization</a:t>
-            </a:r>
-          </a:p>
-        </p:txBody>
-      </p:sp>
-      <p:sp>
-        <p:nvSpPr>
-          <p:cNvPr id="53" name="Rectangle 52"/>
+              <a:t>Platform subscription</a:t>
+            </a:r>
+          </a:p>
+        </p:txBody>
+      </p:sp>
+      <p:sp>
+        <p:nvSpPr>
+          <p:cNvPr id="87" name="Rectangle 86"/>
           <p:cNvSpPr/>
           <p:nvPr/>
         </p:nvSpPr>
         <p:spPr>
           <a:xfrm>
-            <a:off x="914400" y="2606039"/>
-            <a:ext cx="1298448" cy="274320"/>
+            <a:off x="914400" y="5495544"/>
+            <a:ext cx="1353312" cy="292608"/>
           </a:xfrm>
           <a:prstGeom prst="rect">
             <a:avLst/>
@@ -9834,14 +11020,14 @@
       </p:sp>
       <p:sp>
         <p:nvSpPr>
-          <p:cNvPr id="54" name="TextBox 53"/>
+          <p:cNvPr id="88" name="TextBox 87"/>
           <p:cNvSpPr txBox="1"/>
           <p:nvPr/>
         </p:nvSpPr>
         <p:spPr>
           <a:xfrm>
-            <a:off x="996696" y="2660903"/>
-            <a:ext cx="1133856" cy="164592"/>
+            <a:off x="996696" y="5550407"/>
+            <a:ext cx="1188720" cy="182880"/>
           </a:xfrm>
           <a:prstGeom prst="rect">
             <a:avLst/>
@@ -9871,38 +11057,16 @@
           </a:p>
         </p:txBody>
       </p:sp>
-      <p:cxnSp>
-        <p:nvCxnSpPr>
-          <p:cNvPr id="55" name="Connector 54"/>
-          <p:cNvCxnSpPr/>
-          <p:nvPr/>
-        </p:nvCxnSpPr>
-        <p:spPr>
-          <a:xfrm>
-            <a:off x="914400" y="2953511"/>
-            <a:ext cx="4587087" cy="0"/>
-          </a:xfrm>
-          <a:prstGeom prst="line">
-            <a:avLst/>
-          </a:prstGeom>
-          <a:ln w="6350">
-            <a:solidFill>
-              <a:srgbClr val="A8A69E"/>
-            </a:solidFill>
-          </a:ln>
-          <a:effectLst/>
-        </p:spPr>
-      </p:cxnSp>
-      <p:sp>
-        <p:nvSpPr>
-          <p:cNvPr id="56" name="TextBox 55"/>
+      <p:sp>
+        <p:nvSpPr>
+          <p:cNvPr id="89" name="TextBox 88"/>
           <p:cNvSpPr txBox="1"/>
           <p:nvPr/>
         </p:nvSpPr>
         <p:spPr>
           <a:xfrm>
-            <a:off x="914400" y="3008376"/>
-            <a:ext cx="4587087" cy="310896"/>
+            <a:off x="3573703" y="5202936"/>
+            <a:ext cx="2384983" cy="256032"/>
           </a:xfrm>
           <a:prstGeom prst="rect">
             <a:avLst/>
@@ -9921,7 +11085,7 @@
               </a:lnSpc>
             </a:pPr>
             <a:r>
-              <a:rPr sz="1350" b="0">
+              <a:rPr sz="1250" b="0">
                 <a:solidFill>
                   <a:srgbClr val="313337"/>
                 </a:solidFill>
@@ -9934,14 +11098,14 @@
       </p:sp>
       <p:sp>
         <p:nvSpPr>
-          <p:cNvPr id="57" name="Rectangle 56"/>
+          <p:cNvPr id="90" name="Rectangle 89"/>
           <p:cNvSpPr/>
           <p:nvPr/>
         </p:nvSpPr>
         <p:spPr>
           <a:xfrm>
-            <a:off x="914400" y="3319272"/>
-            <a:ext cx="1298448" cy="274320"/>
+            <a:off x="3573703" y="5495544"/>
+            <a:ext cx="1353312" cy="292608"/>
           </a:xfrm>
           <a:prstGeom prst="rect">
             <a:avLst/>
@@ -9965,14 +11129,14 @@
       </p:sp>
       <p:sp>
         <p:nvSpPr>
-          <p:cNvPr id="58" name="TextBox 57"/>
+          <p:cNvPr id="91" name="TextBox 90"/>
           <p:cNvSpPr txBox="1"/>
           <p:nvPr/>
         </p:nvSpPr>
         <p:spPr>
           <a:xfrm>
-            <a:off x="996696" y="3374136"/>
-            <a:ext cx="1133856" cy="164592"/>
+            <a:off x="3655999" y="5550407"/>
+            <a:ext cx="1188720" cy="182880"/>
           </a:xfrm>
           <a:prstGeom prst="rect">
             <a:avLst/>
@@ -10002,38 +11166,16 @@
           </a:p>
         </p:txBody>
       </p:sp>
-      <p:cxnSp>
-        <p:nvCxnSpPr>
-          <p:cNvPr id="59" name="Connector 58"/>
-          <p:cNvCxnSpPr/>
-          <p:nvPr/>
-        </p:nvCxnSpPr>
-        <p:spPr>
-          <a:xfrm>
-            <a:off x="914400" y="3666744"/>
-            <a:ext cx="4587087" cy="0"/>
-          </a:xfrm>
-          <a:prstGeom prst="line">
-            <a:avLst/>
-          </a:prstGeom>
-          <a:ln w="6350">
-            <a:solidFill>
-              <a:srgbClr val="A8A69E"/>
-            </a:solidFill>
-          </a:ln>
-          <a:effectLst/>
-        </p:spPr>
-      </p:cxnSp>
-      <p:sp>
-        <p:nvSpPr>
-          <p:cNvPr id="60" name="TextBox 59"/>
+      <p:sp>
+        <p:nvSpPr>
+          <p:cNvPr id="92" name="TextBox 91"/>
           <p:cNvSpPr txBox="1"/>
           <p:nvPr/>
         </p:nvSpPr>
         <p:spPr>
           <a:xfrm>
-            <a:off x="914400" y="3721608"/>
-            <a:ext cx="4587087" cy="310896"/>
+            <a:off x="6233007" y="5202936"/>
+            <a:ext cx="2384983" cy="256032"/>
           </a:xfrm>
           <a:prstGeom prst="rect">
             <a:avLst/>
@@ -10052,7 +11194,7 @@
               </a:lnSpc>
             </a:pPr>
             <a:r>
-              <a:rPr sz="1350" b="0">
+              <a:rPr sz="1250" b="0">
                 <a:solidFill>
                   <a:srgbClr val="313337"/>
                 </a:solidFill>
@@ -10065,14 +11207,14 @@
       </p:sp>
       <p:sp>
         <p:nvSpPr>
-          <p:cNvPr id="61" name="Rectangle 60"/>
+          <p:cNvPr id="93" name="Rectangle 92"/>
           <p:cNvSpPr/>
           <p:nvPr/>
         </p:nvSpPr>
         <p:spPr>
           <a:xfrm>
-            <a:off x="914400" y="4032504"/>
-            <a:ext cx="1298448" cy="274320"/>
+            <a:off x="6233007" y="5495544"/>
+            <a:ext cx="1353312" cy="292608"/>
           </a:xfrm>
           <a:prstGeom prst="rect">
             <a:avLst/>
@@ -10096,14 +11238,14 @@
       </p:sp>
       <p:sp>
         <p:nvSpPr>
-          <p:cNvPr id="62" name="TextBox 61"/>
+          <p:cNvPr id="94" name="TextBox 93"/>
           <p:cNvSpPr txBox="1"/>
           <p:nvPr/>
         </p:nvSpPr>
         <p:spPr>
           <a:xfrm>
-            <a:off x="996696" y="4087368"/>
-            <a:ext cx="1133856" cy="164592"/>
+            <a:off x="6315303" y="5550407"/>
+            <a:ext cx="1188720" cy="182880"/>
           </a:xfrm>
           <a:prstGeom prst="rect">
             <a:avLst/>
@@ -10133,38 +11275,16 @@
           </a:p>
         </p:txBody>
       </p:sp>
-      <p:cxnSp>
-        <p:nvCxnSpPr>
-          <p:cNvPr id="63" name="Connector 62"/>
-          <p:cNvCxnSpPr/>
-          <p:nvPr/>
-        </p:nvCxnSpPr>
-        <p:spPr>
-          <a:xfrm>
-            <a:off x="914400" y="4379976"/>
-            <a:ext cx="4587087" cy="0"/>
-          </a:xfrm>
-          <a:prstGeom prst="line">
-            <a:avLst/>
-          </a:prstGeom>
-          <a:ln w="6350">
-            <a:solidFill>
-              <a:srgbClr val="A8A69E"/>
-            </a:solidFill>
-          </a:ln>
-          <a:effectLst/>
-        </p:spPr>
-      </p:cxnSp>
-      <p:sp>
-        <p:nvSpPr>
-          <p:cNvPr id="64" name="TextBox 63"/>
+      <p:sp>
+        <p:nvSpPr>
+          <p:cNvPr id="95" name="TextBox 94"/>
           <p:cNvSpPr txBox="1"/>
           <p:nvPr/>
         </p:nvSpPr>
         <p:spPr>
           <a:xfrm>
-            <a:off x="914400" y="4434840"/>
-            <a:ext cx="4587087" cy="310896"/>
+            <a:off x="8892311" y="5202936"/>
+            <a:ext cx="2384983" cy="256032"/>
           </a:xfrm>
           <a:prstGeom prst="rect">
             <a:avLst/>
@@ -10183,7 +11303,7 @@
               </a:lnSpc>
             </a:pPr>
             <a:r>
-              <a:rPr sz="1350" b="0">
+              <a:rPr sz="1250" b="0">
                 <a:solidFill>
                   <a:srgbClr val="313337"/>
                 </a:solidFill>
@@ -10196,14 +11316,14 @@
       </p:sp>
       <p:sp>
         <p:nvSpPr>
-          <p:cNvPr id="65" name="Rectangle 64"/>
+          <p:cNvPr id="96" name="Rectangle 95"/>
           <p:cNvSpPr/>
           <p:nvPr/>
         </p:nvSpPr>
         <p:spPr>
           <a:xfrm>
-            <a:off x="914400" y="4745736"/>
-            <a:ext cx="1298448" cy="274320"/>
+            <a:off x="8892311" y="5495544"/>
+            <a:ext cx="1353312" cy="292608"/>
           </a:xfrm>
           <a:prstGeom prst="rect">
             <a:avLst/>
@@ -10227,14 +11347,14 @@
       </p:sp>
       <p:sp>
         <p:nvSpPr>
-          <p:cNvPr id="66" name="TextBox 65"/>
+          <p:cNvPr id="97" name="TextBox 96"/>
           <p:cNvSpPr txBox="1"/>
           <p:nvPr/>
         </p:nvSpPr>
         <p:spPr>
           <a:xfrm>
-            <a:off x="996696" y="4800599"/>
-            <a:ext cx="1133856" cy="164592"/>
+            <a:off x="8974607" y="5550407"/>
+            <a:ext cx="1188720" cy="182880"/>
           </a:xfrm>
           <a:prstGeom prst="rect">
             <a:avLst/>
@@ -10260,630 +11380,6 @@
                 <a:latin typeface="IBM Plex Mono"/>
               </a:rPr>
               <a:t>[ASSUMPTION]</a:t>
-            </a:r>
-          </a:p>
-        </p:txBody>
-      </p:sp>
-      <p:cxnSp>
-        <p:nvCxnSpPr>
-          <p:cNvPr id="67" name="Connector 66"/>
-          <p:cNvCxnSpPr/>
-          <p:nvPr/>
-        </p:nvCxnSpPr>
-        <p:spPr>
-          <a:xfrm>
-            <a:off x="914400" y="5093207"/>
-            <a:ext cx="4587087" cy="0"/>
-          </a:xfrm>
-          <a:prstGeom prst="line">
-            <a:avLst/>
-          </a:prstGeom>
-          <a:ln w="6350">
-            <a:solidFill>
-              <a:srgbClr val="A8A69E"/>
-            </a:solidFill>
-          </a:ln>
-          <a:effectLst/>
-        </p:spPr>
-      </p:cxnSp>
-      <p:sp>
-        <p:nvSpPr>
-          <p:cNvPr id="68" name="TextBox 67"/>
-          <p:cNvSpPr txBox="1"/>
-          <p:nvPr/>
-        </p:nvSpPr>
-        <p:spPr>
-          <a:xfrm>
-            <a:off x="6370167" y="1929384"/>
-            <a:ext cx="3657600" cy="219456"/>
-          </a:xfrm>
-          <a:prstGeom prst="rect">
-            <a:avLst/>
-          </a:prstGeom>
-          <a:noFill/>
-        </p:spPr>
-        <p:txBody>
-          <a:bodyPr wrap="square" anchor="t" lIns="0" rIns="0" tIns="0" bIns="0">
-            <a:spAutoFit/>
-          </a:bodyPr>
-          <a:lstStyle/>
-          <a:p>
-            <a:pPr algn="l">
-              <a:lnSpc>
-                <a:spcPct val="100000"/>
-              </a:lnSpc>
-            </a:pPr>
-            <a:r>
-              <a:rPr sz="950" b="0" spc="90">
-                <a:solidFill>
-                  <a:srgbClr val="A8A69E"/>
-                </a:solidFill>
-                <a:latin typeface="IBM Plex Mono"/>
-              </a:rPr>
-              <a:t>LAND AND EXPAND</a:t>
-            </a:r>
-          </a:p>
-        </p:txBody>
-      </p:sp>
-      <p:sp>
-        <p:nvSpPr>
-          <p:cNvPr id="69" name="Rectangle 68"/>
-          <p:cNvSpPr/>
-          <p:nvPr/>
-        </p:nvSpPr>
-        <p:spPr>
-          <a:xfrm>
-            <a:off x="6370167" y="4590288"/>
-            <a:ext cx="4907127" cy="365760"/>
-          </a:xfrm>
-          <a:prstGeom prst="rect">
-            <a:avLst/>
-          </a:prstGeom>
-          <a:noFill/>
-          <a:ln w="19050">
-            <a:solidFill>
-              <a:srgbClr val="1B4D7A"/>
-            </a:solidFill>
-          </a:ln>
-          <a:effectLst/>
-        </p:spPr>
-        <p:txBody>
-          <a:bodyPr rtlCol="0" anchor="ctr"/>
-          <a:lstStyle/>
-          <a:p>
-            <a:pPr algn="ctr"/>
-          </a:p>
-        </p:txBody>
-      </p:sp>
-      <p:sp>
-        <p:nvSpPr>
-          <p:cNvPr id="70" name="TextBox 69"/>
-          <p:cNvSpPr txBox="1"/>
-          <p:nvPr/>
-        </p:nvSpPr>
-        <p:spPr>
-          <a:xfrm>
-            <a:off x="6434175" y="4636007"/>
-            <a:ext cx="4779111" cy="274320"/>
-          </a:xfrm>
-          <a:prstGeom prst="rect">
-            <a:avLst/>
-          </a:prstGeom>
-          <a:noFill/>
-        </p:spPr>
-        <p:txBody>
-          <a:bodyPr wrap="square" anchor="ctr" lIns="0" rIns="0" tIns="0" bIns="0">
-            <a:spAutoFit/>
-          </a:bodyPr>
-          <a:lstStyle/>
-          <a:p>
-            <a:pPr algn="ctr">
-              <a:lnSpc>
-                <a:spcPct val="112000"/>
-              </a:lnSpc>
-            </a:pPr>
-            <a:r>
-              <a:rPr sz="900" b="0">
-                <a:solidFill>
-                  <a:srgbClr val="1B4D7A"/>
-                </a:solidFill>
-                <a:latin typeface="IBM Plex Mono"/>
-              </a:rPr>
-              <a:t>Quote Desk</a:t>
-            </a:r>
-          </a:p>
-        </p:txBody>
-      </p:sp>
-      <p:sp>
-        <p:nvSpPr>
-          <p:cNvPr id="71" name="Rectangle 70"/>
-          <p:cNvSpPr/>
-          <p:nvPr/>
-        </p:nvSpPr>
-        <p:spPr>
-          <a:xfrm>
-            <a:off x="6370167" y="4133087"/>
-            <a:ext cx="4907127" cy="365760"/>
-          </a:xfrm>
-          <a:prstGeom prst="rect">
-            <a:avLst/>
-          </a:prstGeom>
-          <a:noFill/>
-          <a:ln w="7620">
-            <a:solidFill>
-              <a:srgbClr val="1B4D7A"/>
-            </a:solidFill>
-          </a:ln>
-          <a:effectLst/>
-        </p:spPr>
-        <p:txBody>
-          <a:bodyPr rtlCol="0" anchor="ctr"/>
-          <a:lstStyle/>
-          <a:p>
-            <a:pPr algn="ctr"/>
-          </a:p>
-        </p:txBody>
-      </p:sp>
-      <p:sp>
-        <p:nvSpPr>
-          <p:cNvPr id="72" name="TextBox 71"/>
-          <p:cNvSpPr txBox="1"/>
-          <p:nvPr/>
-        </p:nvSpPr>
-        <p:spPr>
-          <a:xfrm>
-            <a:off x="6434175" y="4178807"/>
-            <a:ext cx="4779111" cy="274320"/>
-          </a:xfrm>
-          <a:prstGeom prst="rect">
-            <a:avLst/>
-          </a:prstGeom>
-          <a:noFill/>
-        </p:spPr>
-        <p:txBody>
-          <a:bodyPr wrap="square" anchor="ctr" lIns="0" rIns="0" tIns="0" bIns="0">
-            <a:spAutoFit/>
-          </a:bodyPr>
-          <a:lstStyle/>
-          <a:p>
-            <a:pPr algn="ctr">
-              <a:lnSpc>
-                <a:spcPct val="112000"/>
-              </a:lnSpc>
-            </a:pPr>
-            <a:r>
-              <a:rPr sz="900" b="0">
-                <a:solidFill>
-                  <a:srgbClr val="313337"/>
-                </a:solidFill>
-                <a:latin typeface="IBM Plex Mono"/>
-              </a:rPr>
-              <a:t>Product Intelligence</a:t>
-            </a:r>
-          </a:p>
-        </p:txBody>
-      </p:sp>
-      <p:cxnSp>
-        <p:nvCxnSpPr>
-          <p:cNvPr id="73" name="Connector 72"/>
-          <p:cNvCxnSpPr/>
-          <p:nvPr/>
-        </p:nvCxnSpPr>
-        <p:spPr>
-          <a:xfrm>
-            <a:off x="6681063" y="4498848"/>
-            <a:ext cx="0" cy="91440"/>
-          </a:xfrm>
-          <a:prstGeom prst="line">
-            <a:avLst/>
-          </a:prstGeom>
-          <a:ln w="6350">
-            <a:solidFill>
-              <a:srgbClr val="A8A69E"/>
-            </a:solidFill>
-          </a:ln>
-          <a:effectLst/>
-        </p:spPr>
-      </p:cxnSp>
-      <p:sp>
-        <p:nvSpPr>
-          <p:cNvPr id="74" name="Rectangle 73"/>
-          <p:cNvSpPr/>
-          <p:nvPr/>
-        </p:nvSpPr>
-        <p:spPr>
-          <a:xfrm>
-            <a:off x="6370167" y="3675887"/>
-            <a:ext cx="4907127" cy="365760"/>
-          </a:xfrm>
-          <a:prstGeom prst="rect">
-            <a:avLst/>
-          </a:prstGeom>
-          <a:noFill/>
-          <a:ln w="7620">
-            <a:solidFill>
-              <a:srgbClr val="1B4D7A"/>
-            </a:solidFill>
-          </a:ln>
-          <a:effectLst/>
-        </p:spPr>
-        <p:txBody>
-          <a:bodyPr rtlCol="0" anchor="ctr"/>
-          <a:lstStyle/>
-          <a:p>
-            <a:pPr algn="ctr"/>
-          </a:p>
-        </p:txBody>
-      </p:sp>
-      <p:sp>
-        <p:nvSpPr>
-          <p:cNvPr id="75" name="TextBox 74"/>
-          <p:cNvSpPr txBox="1"/>
-          <p:nvPr/>
-        </p:nvSpPr>
-        <p:spPr>
-          <a:xfrm>
-            <a:off x="6434175" y="3721607"/>
-            <a:ext cx="4779111" cy="274320"/>
-          </a:xfrm>
-          <a:prstGeom prst="rect">
-            <a:avLst/>
-          </a:prstGeom>
-          <a:noFill/>
-        </p:spPr>
-        <p:txBody>
-          <a:bodyPr wrap="square" anchor="ctr" lIns="0" rIns="0" tIns="0" bIns="0">
-            <a:spAutoFit/>
-          </a:bodyPr>
-          <a:lstStyle/>
-          <a:p>
-            <a:pPr algn="ctr">
-              <a:lnSpc>
-                <a:spcPct val="112000"/>
-              </a:lnSpc>
-            </a:pPr>
-            <a:r>
-              <a:rPr sz="900" b="0">
-                <a:solidFill>
-                  <a:srgbClr val="313337"/>
-                </a:solidFill>
-                <a:latin typeface="IBM Plex Mono"/>
-              </a:rPr>
-              <a:t>Pricing</a:t>
-            </a:r>
-          </a:p>
-        </p:txBody>
-      </p:sp>
-      <p:cxnSp>
-        <p:nvCxnSpPr>
-          <p:cNvPr id="76" name="Connector 75"/>
-          <p:cNvCxnSpPr/>
-          <p:nvPr/>
-        </p:nvCxnSpPr>
-        <p:spPr>
-          <a:xfrm>
-            <a:off x="6681063" y="4041648"/>
-            <a:ext cx="0" cy="91439"/>
-          </a:xfrm>
-          <a:prstGeom prst="line">
-            <a:avLst/>
-          </a:prstGeom>
-          <a:ln w="6350">
-            <a:solidFill>
-              <a:srgbClr val="A8A69E"/>
-            </a:solidFill>
-          </a:ln>
-          <a:effectLst/>
-        </p:spPr>
-      </p:cxnSp>
-      <p:sp>
-        <p:nvSpPr>
-          <p:cNvPr id="77" name="Rectangle 76"/>
-          <p:cNvSpPr/>
-          <p:nvPr/>
-        </p:nvSpPr>
-        <p:spPr>
-          <a:xfrm>
-            <a:off x="6370167" y="3218687"/>
-            <a:ext cx="4907127" cy="365760"/>
-          </a:xfrm>
-          <a:prstGeom prst="rect">
-            <a:avLst/>
-          </a:prstGeom>
-          <a:noFill/>
-          <a:ln w="7620">
-            <a:solidFill>
-              <a:srgbClr val="1B4D7A"/>
-            </a:solidFill>
-          </a:ln>
-          <a:effectLst/>
-        </p:spPr>
-        <p:txBody>
-          <a:bodyPr rtlCol="0" anchor="ctr"/>
-          <a:lstStyle/>
-          <a:p>
-            <a:pPr algn="ctr"/>
-          </a:p>
-        </p:txBody>
-      </p:sp>
-      <p:sp>
-        <p:nvSpPr>
-          <p:cNvPr id="78" name="TextBox 77"/>
-          <p:cNvSpPr txBox="1"/>
-          <p:nvPr/>
-        </p:nvSpPr>
-        <p:spPr>
-          <a:xfrm>
-            <a:off x="6434175" y="3264407"/>
-            <a:ext cx="4779111" cy="274320"/>
-          </a:xfrm>
-          <a:prstGeom prst="rect">
-            <a:avLst/>
-          </a:prstGeom>
-          <a:noFill/>
-        </p:spPr>
-        <p:txBody>
-          <a:bodyPr wrap="square" anchor="ctr" lIns="0" rIns="0" tIns="0" bIns="0">
-            <a:spAutoFit/>
-          </a:bodyPr>
-          <a:lstStyle/>
-          <a:p>
-            <a:pPr algn="ctr">
-              <a:lnSpc>
-                <a:spcPct val="112000"/>
-              </a:lnSpc>
-            </a:pPr>
-            <a:r>
-              <a:rPr sz="900" b="0">
-                <a:solidFill>
-                  <a:srgbClr val="313337"/>
-                </a:solidFill>
-                <a:latin typeface="IBM Plex Mono"/>
-              </a:rPr>
-              <a:t>Margin Management</a:t>
-            </a:r>
-          </a:p>
-        </p:txBody>
-      </p:sp>
-      <p:cxnSp>
-        <p:nvCxnSpPr>
-          <p:cNvPr id="79" name="Connector 78"/>
-          <p:cNvCxnSpPr/>
-          <p:nvPr/>
-        </p:nvCxnSpPr>
-        <p:spPr>
-          <a:xfrm>
-            <a:off x="6681063" y="3584447"/>
-            <a:ext cx="0" cy="91440"/>
-          </a:xfrm>
-          <a:prstGeom prst="line">
-            <a:avLst/>
-          </a:prstGeom>
-          <a:ln w="6350">
-            <a:solidFill>
-              <a:srgbClr val="A8A69E"/>
-            </a:solidFill>
-          </a:ln>
-          <a:effectLst/>
-        </p:spPr>
-      </p:cxnSp>
-      <p:sp>
-        <p:nvSpPr>
-          <p:cNvPr id="80" name="Rectangle 79"/>
-          <p:cNvSpPr/>
-          <p:nvPr/>
-        </p:nvSpPr>
-        <p:spPr>
-          <a:xfrm>
-            <a:off x="6370167" y="2761487"/>
-            <a:ext cx="4907127" cy="365760"/>
-          </a:xfrm>
-          <a:prstGeom prst="rect">
-            <a:avLst/>
-          </a:prstGeom>
-          <a:noFill/>
-          <a:ln w="7620">
-            <a:solidFill>
-              <a:srgbClr val="1B4D7A"/>
-            </a:solidFill>
-          </a:ln>
-          <a:effectLst/>
-        </p:spPr>
-        <p:txBody>
-          <a:bodyPr rtlCol="0" anchor="ctr"/>
-          <a:lstStyle/>
-          <a:p>
-            <a:pPr algn="ctr"/>
-          </a:p>
-        </p:txBody>
-      </p:sp>
-      <p:sp>
-        <p:nvSpPr>
-          <p:cNvPr id="81" name="TextBox 80"/>
-          <p:cNvSpPr txBox="1"/>
-          <p:nvPr/>
-        </p:nvSpPr>
-        <p:spPr>
-          <a:xfrm>
-            <a:off x="6434175" y="2807207"/>
-            <a:ext cx="4779111" cy="274320"/>
-          </a:xfrm>
-          <a:prstGeom prst="rect">
-            <a:avLst/>
-          </a:prstGeom>
-          <a:noFill/>
-        </p:spPr>
-        <p:txBody>
-          <a:bodyPr wrap="square" anchor="ctr" lIns="0" rIns="0" tIns="0" bIns="0">
-            <a:spAutoFit/>
-          </a:bodyPr>
-          <a:lstStyle/>
-          <a:p>
-            <a:pPr algn="ctr">
-              <a:lnSpc>
-                <a:spcPct val="112000"/>
-              </a:lnSpc>
-            </a:pPr>
-            <a:r>
-              <a:rPr sz="900" b="0">
-                <a:solidFill>
-                  <a:srgbClr val="313337"/>
-                </a:solidFill>
-                <a:latin typeface="IBM Plex Mono"/>
-              </a:rPr>
-              <a:t>Agents</a:t>
-            </a:r>
-          </a:p>
-        </p:txBody>
-      </p:sp>
-      <p:cxnSp>
-        <p:nvCxnSpPr>
-          <p:cNvPr id="82" name="Connector 81"/>
-          <p:cNvCxnSpPr/>
-          <p:nvPr/>
-        </p:nvCxnSpPr>
-        <p:spPr>
-          <a:xfrm>
-            <a:off x="6681063" y="3127247"/>
-            <a:ext cx="0" cy="91440"/>
-          </a:xfrm>
-          <a:prstGeom prst="line">
-            <a:avLst/>
-          </a:prstGeom>
-          <a:ln w="6350">
-            <a:solidFill>
-              <a:srgbClr val="A8A69E"/>
-            </a:solidFill>
-          </a:ln>
-          <a:effectLst/>
-        </p:spPr>
-      </p:cxnSp>
-      <p:sp>
-        <p:nvSpPr>
-          <p:cNvPr id="83" name="Rectangle 82"/>
-          <p:cNvSpPr/>
-          <p:nvPr/>
-        </p:nvSpPr>
-        <p:spPr>
-          <a:xfrm>
-            <a:off x="6370167" y="2304287"/>
-            <a:ext cx="4907127" cy="365760"/>
-          </a:xfrm>
-          <a:prstGeom prst="rect">
-            <a:avLst/>
-          </a:prstGeom>
-          <a:noFill/>
-          <a:ln w="7620">
-            <a:solidFill>
-              <a:srgbClr val="1B4D7A"/>
-            </a:solidFill>
-          </a:ln>
-          <a:effectLst/>
-        </p:spPr>
-        <p:txBody>
-          <a:bodyPr rtlCol="0" anchor="ctr"/>
-          <a:lstStyle/>
-          <a:p>
-            <a:pPr algn="ctr"/>
-          </a:p>
-        </p:txBody>
-      </p:sp>
-      <p:sp>
-        <p:nvSpPr>
-          <p:cNvPr id="84" name="TextBox 83"/>
-          <p:cNvSpPr txBox="1"/>
-          <p:nvPr/>
-        </p:nvSpPr>
-        <p:spPr>
-          <a:xfrm>
-            <a:off x="6434175" y="2350007"/>
-            <a:ext cx="4779111" cy="274320"/>
-          </a:xfrm>
-          <a:prstGeom prst="rect">
-            <a:avLst/>
-          </a:prstGeom>
-          <a:noFill/>
-        </p:spPr>
-        <p:txBody>
-          <a:bodyPr wrap="square" anchor="ctr" lIns="0" rIns="0" tIns="0" bIns="0">
-            <a:spAutoFit/>
-          </a:bodyPr>
-          <a:lstStyle/>
-          <a:p>
-            <a:pPr algn="ctr">
-              <a:lnSpc>
-                <a:spcPct val="112000"/>
-              </a:lnSpc>
-            </a:pPr>
-            <a:r>
-              <a:rPr sz="900" b="0">
-                <a:solidFill>
-                  <a:srgbClr val="313337"/>
-                </a:solidFill>
-                <a:latin typeface="IBM Plex Mono"/>
-              </a:rPr>
-              <a:t>Commercial Intelligence</a:t>
-            </a:r>
-          </a:p>
-        </p:txBody>
-      </p:sp>
-      <p:cxnSp>
-        <p:nvCxnSpPr>
-          <p:cNvPr id="85" name="Connector 84"/>
-          <p:cNvCxnSpPr/>
-          <p:nvPr/>
-        </p:nvCxnSpPr>
-        <p:spPr>
-          <a:xfrm>
-            <a:off x="6681063" y="2670047"/>
-            <a:ext cx="0" cy="91440"/>
-          </a:xfrm>
-          <a:prstGeom prst="line">
-            <a:avLst/>
-          </a:prstGeom>
-          <a:ln w="6350">
-            <a:solidFill>
-              <a:srgbClr val="A8A69E"/>
-            </a:solidFill>
-          </a:ln>
-          <a:effectLst/>
-        </p:spPr>
-      </p:cxnSp>
-      <p:sp>
-        <p:nvSpPr>
-          <p:cNvPr id="86" name="TextBox 85"/>
-          <p:cNvSpPr txBox="1"/>
-          <p:nvPr/>
-        </p:nvSpPr>
-        <p:spPr>
-          <a:xfrm>
-            <a:off x="914400" y="5303520"/>
-            <a:ext cx="9966960" cy="640080"/>
-          </a:xfrm>
-          <a:prstGeom prst="rect">
-            <a:avLst/>
-          </a:prstGeom>
-          <a:noFill/>
-        </p:spPr>
-        <p:txBody>
-          <a:bodyPr wrap="square" anchor="t" lIns="0" rIns="0" tIns="0" bIns="0">
-            <a:spAutoFit/>
-          </a:bodyPr>
-          <a:lstStyle/>
-          <a:p>
-            <a:pPr algn="l">
-              <a:lnSpc>
-                <a:spcPct val="128000"/>
-              </a:lnSpc>
-            </a:pPr>
-            <a:r>
-              <a:rPr sz="1250" b="0">
-                <a:solidFill>
-                  <a:srgbClr val="313337"/>
-                </a:solidFill>
-                <a:latin typeface="IBM Plex Sans"/>
-              </a:rPr>
-              <a:t>The quote desk is the wedge because it is where a distributor already feels the pain daily and where the value is legible in one session. Price points are unvalidated.</a:t>
             </a:r>
           </a:p>
         </p:txBody>

--- a/outputs/pie-investor-deck.pptx
+++ b/outputs/pie-investor-deck.pptx
@@ -32464,8 +32464,8 @@
         </p:nvSpPr>
         <p:spPr>
           <a:xfrm>
-            <a:off x="914400" y="2185415"/>
-            <a:ext cx="2788920" cy="347472"/>
+            <a:off x="914400" y="2240279"/>
+            <a:ext cx="2788920" cy="384048"/>
           </a:xfrm>
           <a:prstGeom prst="rect">
             <a:avLst/>
@@ -32494,8 +32494,8 @@
         </p:nvSpPr>
         <p:spPr>
           <a:xfrm>
-            <a:off x="978408" y="2231135"/>
-            <a:ext cx="2660903" cy="256032"/>
+            <a:off x="978408" y="2285999"/>
+            <a:ext cx="2660903" cy="292607"/>
           </a:xfrm>
           <a:prstGeom prst="rect">
             <a:avLst/>
@@ -32533,8 +32533,8 @@
         </p:nvSpPr>
         <p:spPr>
           <a:xfrm>
-            <a:off x="914400" y="2615183"/>
-            <a:ext cx="2788920" cy="347472"/>
+            <a:off x="914400" y="2715768"/>
+            <a:ext cx="2788920" cy="384048"/>
           </a:xfrm>
           <a:prstGeom prst="rect">
             <a:avLst/>
@@ -32563,99 +32563,8 @@
         </p:nvSpPr>
         <p:spPr>
           <a:xfrm>
-            <a:off x="978408" y="2660903"/>
-            <a:ext cx="2660903" cy="256032"/>
-          </a:xfrm>
-          <a:prstGeom prst="rect">
-            <a:avLst/>
-          </a:prstGeom>
-          <a:noFill/>
-        </p:spPr>
-        <p:txBody>
-          <a:bodyPr wrap="square" anchor="ctr" lIns="0" rIns="0" tIns="0" bIns="0">
-            <a:spAutoFit/>
-          </a:bodyPr>
-          <a:lstStyle/>
-          <a:p>
-            <a:pPr algn="ctr">
-              <a:lnSpc>
-                <a:spcPct val="112000"/>
-              </a:lnSpc>
-            </a:pPr>
-            <a:r>
-              <a:rPr sz="850" b="0">
-                <a:solidFill>
-                  <a:srgbClr val="313337"/>
-                </a:solidFill>
-                <a:latin typeface="IBM Plex Mono"/>
-              </a:rPr>
-              <a:t>Industrial tools</a:t>
-            </a:r>
-          </a:p>
-        </p:txBody>
-      </p:sp>
-      <p:cxnSp>
-        <p:nvCxnSpPr>
-          <p:cNvPr id="54" name="Connector 53"/>
-          <p:cNvCxnSpPr/>
-          <p:nvPr/>
-        </p:nvCxnSpPr>
-        <p:spPr>
-          <a:xfrm>
-            <a:off x="2308860" y="2532887"/>
-            <a:ext cx="0" cy="82296"/>
-          </a:xfrm>
-          <a:prstGeom prst="line">
-            <a:avLst/>
-          </a:prstGeom>
-          <a:ln w="6350">
-            <a:solidFill>
-              <a:srgbClr val="A8A69E"/>
-            </a:solidFill>
-          </a:ln>
-          <a:effectLst/>
-        </p:spPr>
-      </p:cxnSp>
-      <p:sp>
-        <p:nvSpPr>
-          <p:cNvPr id="55" name="Rectangle 54"/>
-          <p:cNvSpPr/>
-          <p:nvPr/>
-        </p:nvSpPr>
-        <p:spPr>
-          <a:xfrm>
-            <a:off x="914400" y="3044951"/>
-            <a:ext cx="2788920" cy="347472"/>
-          </a:xfrm>
-          <a:prstGeom prst="rect">
-            <a:avLst/>
-          </a:prstGeom>
-          <a:noFill/>
-          <a:ln w="7620">
-            <a:solidFill>
-              <a:srgbClr val="1B4D7A"/>
-            </a:solidFill>
-          </a:ln>
-          <a:effectLst/>
-        </p:spPr>
-        <p:txBody>
-          <a:bodyPr rtlCol="0" anchor="ctr"/>
-          <a:lstStyle/>
-          <a:p>
-            <a:pPr algn="ctr"/>
-          </a:p>
-        </p:txBody>
-      </p:sp>
-      <p:sp>
-        <p:nvSpPr>
-          <p:cNvPr id="56" name="TextBox 55"/>
-          <p:cNvSpPr txBox="1"/>
-          <p:nvPr/>
-        </p:nvSpPr>
-        <p:spPr>
-          <a:xfrm>
-            <a:off x="978408" y="3090671"/>
-            <a:ext cx="2660903" cy="256032"/>
+            <a:off x="978408" y="2761487"/>
+            <a:ext cx="2660903" cy="292607"/>
           </a:xfrm>
           <a:prstGeom prst="rect">
             <a:avLst/>
@@ -32687,14 +32596,14 @@
       </p:sp>
       <p:cxnSp>
         <p:nvCxnSpPr>
-          <p:cNvPr id="57" name="Connector 56"/>
-          <p:cNvCxnSpPr/>
-          <p:nvPr/>
-        </p:nvCxnSpPr>
-        <p:spPr>
-          <a:xfrm>
-            <a:off x="2308860" y="2962656"/>
-            <a:ext cx="0" cy="82295"/>
+          <p:cNvPr id="54" name="Connector 53"/>
+          <p:cNvCxnSpPr/>
+          <p:nvPr/>
+        </p:nvCxnSpPr>
+        <p:spPr>
+          <a:xfrm>
+            <a:off x="2308860" y="2624327"/>
+            <a:ext cx="0" cy="91441"/>
           </a:xfrm>
           <a:prstGeom prst="line">
             <a:avLst/>
@@ -32709,14 +32618,14 @@
       </p:cxnSp>
       <p:sp>
         <p:nvSpPr>
-          <p:cNvPr id="58" name="Rectangle 57"/>
+          <p:cNvPr id="55" name="Rectangle 54"/>
           <p:cNvSpPr/>
           <p:nvPr/>
         </p:nvSpPr>
         <p:spPr>
           <a:xfrm>
-            <a:off x="914400" y="3474720"/>
-            <a:ext cx="2788920" cy="347472"/>
+            <a:off x="914400" y="3191256"/>
+            <a:ext cx="2788920" cy="384048"/>
           </a:xfrm>
           <a:prstGeom prst="rect">
             <a:avLst/>
@@ -32739,14 +32648,14 @@
       </p:sp>
       <p:sp>
         <p:nvSpPr>
-          <p:cNvPr id="59" name="TextBox 58"/>
+          <p:cNvPr id="56" name="TextBox 55"/>
           <p:cNvSpPr txBox="1"/>
           <p:nvPr/>
         </p:nvSpPr>
         <p:spPr>
           <a:xfrm>
-            <a:off x="978408" y="3520439"/>
-            <a:ext cx="2660903" cy="256032"/>
+            <a:off x="978408" y="3236975"/>
+            <a:ext cx="2660903" cy="292607"/>
           </a:xfrm>
           <a:prstGeom prst="rect">
             <a:avLst/>
@@ -32771,21 +32680,21 @@
                 </a:solidFill>
                 <a:latin typeface="IBM Plex Mono"/>
               </a:rPr>
-              <a:t>Electrical</a:t>
-            </a:r>
-          </a:p>
-        </p:txBody>
-      </p:sp>
-      <p:cxnSp>
-        <p:nvCxnSpPr>
-          <p:cNvPr id="60" name="Connector 59"/>
-          <p:cNvCxnSpPr/>
-          <p:nvPr/>
-        </p:nvCxnSpPr>
-        <p:spPr>
-          <a:xfrm>
-            <a:off x="2308860" y="3392424"/>
-            <a:ext cx="0" cy="82296"/>
+              <a:t>Power transmission</a:t>
+            </a:r>
+          </a:p>
+        </p:txBody>
+      </p:sp>
+      <p:cxnSp>
+        <p:nvCxnSpPr>
+          <p:cNvPr id="57" name="Connector 56"/>
+          <p:cNvCxnSpPr/>
+          <p:nvPr/>
+        </p:nvCxnSpPr>
+        <p:spPr>
+          <a:xfrm>
+            <a:off x="2308860" y="3099815"/>
+            <a:ext cx="0" cy="91441"/>
           </a:xfrm>
           <a:prstGeom prst="line">
             <a:avLst/>
@@ -32800,14 +32709,14 @@
       </p:cxnSp>
       <p:sp>
         <p:nvSpPr>
-          <p:cNvPr id="61" name="Rectangle 60"/>
+          <p:cNvPr id="58" name="Rectangle 57"/>
           <p:cNvSpPr/>
           <p:nvPr/>
         </p:nvSpPr>
         <p:spPr>
           <a:xfrm>
-            <a:off x="914400" y="3904487"/>
-            <a:ext cx="2788920" cy="347472"/>
+            <a:off x="914400" y="3666744"/>
+            <a:ext cx="2788920" cy="384048"/>
           </a:xfrm>
           <a:prstGeom prst="rect">
             <a:avLst/>
@@ -32830,14 +32739,14 @@
       </p:sp>
       <p:sp>
         <p:nvSpPr>
-          <p:cNvPr id="62" name="TextBox 61"/>
+          <p:cNvPr id="59" name="TextBox 58"/>
           <p:cNvSpPr txBox="1"/>
           <p:nvPr/>
         </p:nvSpPr>
         <p:spPr>
           <a:xfrm>
-            <a:off x="978408" y="3950207"/>
-            <a:ext cx="2660903" cy="256032"/>
+            <a:off x="978408" y="3712463"/>
+            <a:ext cx="2660903" cy="292607"/>
           </a:xfrm>
           <a:prstGeom prst="rect">
             <a:avLst/>
@@ -32862,21 +32771,21 @@
                 </a:solidFill>
                 <a:latin typeface="IBM Plex Mono"/>
               </a:rPr>
-              <a:t>MRO</a:t>
-            </a:r>
-          </a:p>
-        </p:txBody>
-      </p:sp>
-      <p:cxnSp>
-        <p:nvCxnSpPr>
-          <p:cNvPr id="63" name="Connector 62"/>
-          <p:cNvCxnSpPr/>
-          <p:nvPr/>
-        </p:nvCxnSpPr>
-        <p:spPr>
-          <a:xfrm>
-            <a:off x="2308860" y="3822191"/>
-            <a:ext cx="0" cy="82296"/>
+              <a:t>Hydraulics, pneumatics</a:t>
+            </a:r>
+          </a:p>
+        </p:txBody>
+      </p:sp>
+      <p:cxnSp>
+        <p:nvCxnSpPr>
+          <p:cNvPr id="60" name="Connector 59"/>
+          <p:cNvCxnSpPr/>
+          <p:nvPr/>
+        </p:nvCxnSpPr>
+        <p:spPr>
+          <a:xfrm>
+            <a:off x="2308860" y="3575303"/>
+            <a:ext cx="0" cy="91441"/>
           </a:xfrm>
           <a:prstGeom prst="line">
             <a:avLst/>
@@ -32891,14 +32800,14 @@
       </p:cxnSp>
       <p:sp>
         <p:nvSpPr>
-          <p:cNvPr id="64" name="Rectangle 63"/>
+          <p:cNvPr id="61" name="Rectangle 60"/>
           <p:cNvSpPr/>
           <p:nvPr/>
         </p:nvSpPr>
         <p:spPr>
           <a:xfrm>
-            <a:off x="914400" y="4334255"/>
-            <a:ext cx="2788920" cy="347472"/>
+            <a:off x="914400" y="4142231"/>
+            <a:ext cx="2788920" cy="384048"/>
           </a:xfrm>
           <a:prstGeom prst="rect">
             <a:avLst/>
@@ -32921,14 +32830,14 @@
       </p:sp>
       <p:sp>
         <p:nvSpPr>
-          <p:cNvPr id="65" name="TextBox 64"/>
+          <p:cNvPr id="62" name="TextBox 61"/>
           <p:cNvSpPr txBox="1"/>
           <p:nvPr/>
         </p:nvSpPr>
         <p:spPr>
           <a:xfrm>
-            <a:off x="978408" y="4379975"/>
-            <a:ext cx="2660903" cy="256032"/>
+            <a:off x="978408" y="4187951"/>
+            <a:ext cx="2660903" cy="292607"/>
           </a:xfrm>
           <a:prstGeom prst="rect">
             <a:avLst/>
@@ -32953,21 +32862,21 @@
                 </a:solidFill>
                 <a:latin typeface="IBM Plex Mono"/>
               </a:rPr>
-              <a:t>Automation</a:t>
-            </a:r>
-          </a:p>
-        </p:txBody>
-      </p:sp>
-      <p:cxnSp>
-        <p:nvCxnSpPr>
-          <p:cNvPr id="66" name="Connector 65"/>
-          <p:cNvCxnSpPr/>
-          <p:nvPr/>
-        </p:nvCxnSpPr>
-        <p:spPr>
-          <a:xfrm>
-            <a:off x="2308860" y="4251959"/>
-            <a:ext cx="0" cy="82296"/>
+              <a:t>Abrasives</a:t>
+            </a:r>
+          </a:p>
+        </p:txBody>
+      </p:sp>
+      <p:cxnSp>
+        <p:nvCxnSpPr>
+          <p:cNvPr id="63" name="Connector 62"/>
+          <p:cNvCxnSpPr/>
+          <p:nvPr/>
+        </p:nvCxnSpPr>
+        <p:spPr>
+          <a:xfrm>
+            <a:off x="2308860" y="4050791"/>
+            <a:ext cx="0" cy="91440"/>
           </a:xfrm>
           <a:prstGeom prst="line">
             <a:avLst/>
@@ -32982,14 +32891,14 @@
       </p:cxnSp>
       <p:sp>
         <p:nvSpPr>
-          <p:cNvPr id="67" name="Rectangle 66"/>
+          <p:cNvPr id="64" name="Rectangle 63"/>
           <p:cNvSpPr/>
           <p:nvPr/>
         </p:nvSpPr>
         <p:spPr>
           <a:xfrm>
-            <a:off x="914400" y="4764023"/>
-            <a:ext cx="2788920" cy="347472"/>
+            <a:off x="914400" y="4617720"/>
+            <a:ext cx="2788920" cy="384048"/>
           </a:xfrm>
           <a:prstGeom prst="rect">
             <a:avLst/>
@@ -33012,14 +32921,14 @@
       </p:sp>
       <p:sp>
         <p:nvSpPr>
-          <p:cNvPr id="68" name="TextBox 67"/>
+          <p:cNvPr id="65" name="TextBox 64"/>
           <p:cNvSpPr txBox="1"/>
           <p:nvPr/>
         </p:nvSpPr>
         <p:spPr>
           <a:xfrm>
-            <a:off x="978408" y="4809743"/>
-            <a:ext cx="2660903" cy="256032"/>
+            <a:off x="978408" y="4663440"/>
+            <a:ext cx="2660903" cy="292607"/>
           </a:xfrm>
           <a:prstGeom prst="rect">
             <a:avLst/>
@@ -33044,21 +32953,21 @@
                 </a:solidFill>
                 <a:latin typeface="IBM Plex Mono"/>
               </a:rPr>
-              <a:t>Fasteners</a:t>
-            </a:r>
-          </a:p>
-        </p:txBody>
-      </p:sp>
-      <p:cxnSp>
-        <p:nvCxnSpPr>
-          <p:cNvPr id="69" name="Connector 68"/>
-          <p:cNvCxnSpPr/>
-          <p:nvPr/>
-        </p:nvCxnSpPr>
-        <p:spPr>
-          <a:xfrm>
-            <a:off x="2308860" y="4681727"/>
-            <a:ext cx="0" cy="82296"/>
+              <a:t>Specialty fasteners</a:t>
+            </a:r>
+          </a:p>
+        </p:txBody>
+      </p:sp>
+      <p:cxnSp>
+        <p:nvCxnSpPr>
+          <p:cNvPr id="66" name="Connector 65"/>
+          <p:cNvCxnSpPr/>
+          <p:nvPr/>
+        </p:nvCxnSpPr>
+        <p:spPr>
+          <a:xfrm>
+            <a:off x="2308860" y="4526280"/>
+            <a:ext cx="0" cy="91440"/>
           </a:xfrm>
           <a:prstGeom prst="line">
             <a:avLst/>
@@ -33073,104 +32982,13 @@
       </p:cxnSp>
       <p:sp>
         <p:nvSpPr>
-          <p:cNvPr id="70" name="Rectangle 69"/>
-          <p:cNvSpPr/>
-          <p:nvPr/>
-        </p:nvSpPr>
-        <p:spPr>
-          <a:xfrm>
-            <a:off x="914400" y="5193792"/>
-            <a:ext cx="2788920" cy="347472"/>
-          </a:xfrm>
-          <a:prstGeom prst="rect">
-            <a:avLst/>
-          </a:prstGeom>
-          <a:noFill/>
-          <a:ln w="7620">
-            <a:solidFill>
-              <a:srgbClr val="1B4D7A"/>
-            </a:solidFill>
-          </a:ln>
-          <a:effectLst/>
-        </p:spPr>
-        <p:txBody>
-          <a:bodyPr rtlCol="0" anchor="ctr"/>
-          <a:lstStyle/>
-          <a:p>
-            <a:pPr algn="ctr"/>
-          </a:p>
-        </p:txBody>
-      </p:sp>
-      <p:sp>
-        <p:nvSpPr>
-          <p:cNvPr id="71" name="TextBox 70"/>
+          <p:cNvPr id="67" name="TextBox 66"/>
           <p:cNvSpPr txBox="1"/>
           <p:nvPr/>
         </p:nvSpPr>
         <p:spPr>
           <a:xfrm>
-            <a:off x="978408" y="5239512"/>
-            <a:ext cx="2660903" cy="256032"/>
-          </a:xfrm>
-          <a:prstGeom prst="rect">
-            <a:avLst/>
-          </a:prstGeom>
-          <a:noFill/>
-        </p:spPr>
-        <p:txBody>
-          <a:bodyPr wrap="square" anchor="ctr" lIns="0" rIns="0" tIns="0" bIns="0">
-            <a:spAutoFit/>
-          </a:bodyPr>
-          <a:lstStyle/>
-          <a:p>
-            <a:pPr algn="ctr">
-              <a:lnSpc>
-                <a:spcPct val="112000"/>
-              </a:lnSpc>
-            </a:pPr>
-            <a:r>
-              <a:rPr sz="850" b="0">
-                <a:solidFill>
-                  <a:srgbClr val="313337"/>
-                </a:solidFill>
-                <a:latin typeface="IBM Plex Mono"/>
-              </a:rPr>
-              <a:t>Consumables</a:t>
-            </a:r>
-          </a:p>
-        </p:txBody>
-      </p:sp>
-      <p:cxnSp>
-        <p:nvCxnSpPr>
-          <p:cNvPr id="72" name="Connector 71"/>
-          <p:cNvCxnSpPr/>
-          <p:nvPr/>
-        </p:nvCxnSpPr>
-        <p:spPr>
-          <a:xfrm>
-            <a:off x="2308860" y="5111496"/>
-            <a:ext cx="0" cy="82296"/>
-          </a:xfrm>
-          <a:prstGeom prst="line">
-            <a:avLst/>
-          </a:prstGeom>
-          <a:ln w="6350">
-            <a:solidFill>
-              <a:srgbClr val="A8A69E"/>
-            </a:solidFill>
-          </a:ln>
-          <a:effectLst/>
-        </p:spPr>
-      </p:cxnSp>
-      <p:sp>
-        <p:nvSpPr>
-          <p:cNvPr id="73" name="TextBox 72"/>
-          <p:cNvSpPr txBox="1"/>
-          <p:nvPr/>
-        </p:nvSpPr>
-        <p:spPr>
-          <a:xfrm>
-            <a:off x="914400" y="1929384"/>
+            <a:off x="914400" y="1965960"/>
             <a:ext cx="2926080" cy="219456"/>
           </a:xfrm>
           <a:prstGeom prst="rect">
@@ -33203,14 +33021,14 @@
       </p:sp>
       <p:sp>
         <p:nvSpPr>
-          <p:cNvPr id="74" name="TextBox 73"/>
+          <p:cNvPr id="68" name="TextBox 67"/>
           <p:cNvSpPr txBox="1"/>
           <p:nvPr/>
         </p:nvSpPr>
         <p:spPr>
           <a:xfrm>
-            <a:off x="4206240" y="2148839"/>
-            <a:ext cx="2834640" cy="1188720"/>
+            <a:off x="4206240" y="2203703"/>
+            <a:ext cx="2834640" cy="1920240"/>
           </a:xfrm>
           <a:prstGeom prst="rect">
             <a:avLst/>
@@ -33229,20 +33047,52 @@
               </a:lnSpc>
             </a:pPr>
             <a:r>
-              <a:rPr sz="1300" b="0">
+              <a:rPr sz="1250" b="0">
                 <a:solidFill>
                   <a:srgbClr val="313337"/>
                 </a:solidFill>
                 <a:latin typeface="IBM Plex Sans"/>
               </a:rPr>
-              <a:t>A new manufacturer is a new data pack. Zero manufacturer literals in the engine — tested, not asserted.</a:t>
-            </a:r>
-          </a:p>
-        </p:txBody>
-      </p:sp>
-      <p:sp>
-        <p:nvSpPr>
-          <p:cNvPr id="75" name="TextBox 74"/>
+              <a:t>Each rung: encoded codes, cross-brand substitution, a catalogue nobody memorises.</a:t>
+            </a:r>
+          </a:p>
+          <a:p>
+            <a:pPr algn="l">
+              <a:lnSpc>
+                <a:spcPct val="130000"/>
+              </a:lnSpc>
+            </a:pPr>
+            <a:r>
+              <a:rPr sz="1250" b="0">
+                <a:solidFill>
+                  <a:srgbClr val="313337"/>
+                </a:solidFill>
+                <a:latin typeface="IBM Plex Sans"/>
+              </a:rPr>
+              <a:t/>
+            </a:r>
+          </a:p>
+          <a:p>
+            <a:pPr algn="l">
+              <a:lnSpc>
+                <a:spcPct val="130000"/>
+              </a:lnSpc>
+            </a:pPr>
+            <a:r>
+              <a:rPr sz="1250" b="0">
+                <a:solidFill>
+                  <a:srgbClr val="313337"/>
+                </a:solidFill>
+                <a:latin typeface="IBM Plex Sans"/>
+              </a:rPr>
+              <a:t>New manufacturer, unchanged engine. New category also needs a standards decoder.</a:t>
+            </a:r>
+          </a:p>
+        </p:txBody>
+      </p:sp>
+      <p:sp>
+        <p:nvSpPr>
+          <p:cNvPr id="69" name="TextBox 68"/>
           <p:cNvSpPr txBox="1"/>
           <p:nvPr/>
         </p:nvSpPr>
@@ -33281,7 +33131,7 @@
       </p:sp>
       <p:sp>
         <p:nvSpPr>
-          <p:cNvPr id="76" name="Rectangle 75"/>
+          <p:cNvPr id="70" name="Rectangle 69"/>
           <p:cNvSpPr/>
           <p:nvPr/>
         </p:nvSpPr>
@@ -33311,7 +33161,7 @@
       </p:sp>
       <p:sp>
         <p:nvSpPr>
-          <p:cNvPr id="77" name="TextBox 76"/>
+          <p:cNvPr id="71" name="TextBox 70"/>
           <p:cNvSpPr txBox="1"/>
           <p:nvPr/>
         </p:nvSpPr>
@@ -33382,7 +33232,7 @@
       </p:sp>
       <p:cxnSp>
         <p:nvCxnSpPr>
-          <p:cNvPr id="78" name="Connector 77"/>
+          <p:cNvPr id="72" name="Connector 71"/>
           <p:cNvCxnSpPr/>
           <p:nvPr/>
         </p:nvCxnSpPr>
@@ -33404,7 +33254,7 @@
       </p:cxnSp>
       <p:sp>
         <p:nvSpPr>
-          <p:cNvPr id="79" name="TextBox 78"/>
+          <p:cNvPr id="73" name="TextBox 72"/>
           <p:cNvSpPr txBox="1"/>
           <p:nvPr/>
         </p:nvSpPr>
@@ -33443,7 +33293,7 @@
       </p:sp>
       <p:sp>
         <p:nvSpPr>
-          <p:cNvPr id="80" name="Rectangle 79"/>
+          <p:cNvPr id="74" name="Rectangle 73"/>
           <p:cNvSpPr/>
           <p:nvPr/>
         </p:nvSpPr>
@@ -33474,7 +33324,7 @@
       </p:sp>
       <p:sp>
         <p:nvSpPr>
-          <p:cNvPr id="81" name="TextBox 80"/>
+          <p:cNvPr id="75" name="TextBox 74"/>
           <p:cNvSpPr txBox="1"/>
           <p:nvPr/>
         </p:nvSpPr>
@@ -33513,7 +33363,7 @@
       </p:sp>
       <p:sp>
         <p:nvSpPr>
-          <p:cNvPr id="82" name="TextBox 81"/>
+          <p:cNvPr id="76" name="TextBox 75"/>
           <p:cNvSpPr txBox="1"/>
           <p:nvPr/>
         </p:nvSpPr>
@@ -33545,14 +33395,14 @@
                 </a:solidFill>
                 <a:latin typeface="IBM Plex Mono"/>
               </a:rPr>
-              <a:t>distributors in scope</a:t>
-            </a:r>
-          </a:p>
-        </p:txBody>
-      </p:sp>
-      <p:sp>
-        <p:nvSpPr>
-          <p:cNvPr id="83" name="TextBox 82"/>
+              <a:t>distributors</a:t>
+            </a:r>
+          </a:p>
+        </p:txBody>
+      </p:sp>
+      <p:sp>
+        <p:nvSpPr>
+          <p:cNvPr id="77" name="TextBox 76"/>
           <p:cNvSpPr txBox="1"/>
           <p:nvPr/>
         </p:nvSpPr>
@@ -33591,7 +33441,7 @@
       </p:sp>
       <p:sp>
         <p:nvSpPr>
-          <p:cNvPr id="84" name="Rectangle 83"/>
+          <p:cNvPr id="78" name="Rectangle 77"/>
           <p:cNvSpPr/>
           <p:nvPr/>
         </p:nvSpPr>
@@ -33622,7 +33472,7 @@
       </p:sp>
       <p:sp>
         <p:nvSpPr>
-          <p:cNvPr id="85" name="TextBox 84"/>
+          <p:cNvPr id="79" name="TextBox 78"/>
           <p:cNvSpPr txBox="1"/>
           <p:nvPr/>
         </p:nvSpPr>
@@ -33661,7 +33511,7 @@
       </p:sp>
       <p:sp>
         <p:nvSpPr>
-          <p:cNvPr id="86" name="TextBox 85"/>
+          <p:cNvPr id="80" name="TextBox 79"/>
           <p:cNvSpPr txBox="1"/>
           <p:nvPr/>
         </p:nvSpPr>
@@ -33700,7 +33550,7 @@
       </p:sp>
       <p:sp>
         <p:nvSpPr>
-          <p:cNvPr id="87" name="TextBox 86"/>
+          <p:cNvPr id="81" name="TextBox 80"/>
           <p:cNvSpPr txBox="1"/>
           <p:nvPr/>
         </p:nvSpPr>
@@ -33739,7 +33589,7 @@
       </p:sp>
       <p:sp>
         <p:nvSpPr>
-          <p:cNvPr id="88" name="Rectangle 87"/>
+          <p:cNvPr id="82" name="Rectangle 81"/>
           <p:cNvSpPr/>
           <p:nvPr/>
         </p:nvSpPr>
@@ -33770,7 +33620,7 @@
       </p:sp>
       <p:sp>
         <p:nvSpPr>
-          <p:cNvPr id="89" name="TextBox 88"/>
+          <p:cNvPr id="83" name="TextBox 82"/>
           <p:cNvSpPr txBox="1"/>
           <p:nvPr/>
         </p:nvSpPr>
@@ -33809,7 +33659,7 @@
       </p:sp>
       <p:sp>
         <p:nvSpPr>
-          <p:cNvPr id="90" name="TextBox 89"/>
+          <p:cNvPr id="84" name="TextBox 83"/>
           <p:cNvSpPr txBox="1"/>
           <p:nvPr/>
         </p:nvSpPr>
@@ -33841,14 +33691,14 @@
                 </a:solidFill>
                 <a:latin typeface="IBM Plex Mono"/>
               </a:rPr>
-              <a:t>share on a connected ERP</a:t>
-            </a:r>
-          </a:p>
-        </p:txBody>
-      </p:sp>
-      <p:sp>
-        <p:nvSpPr>
-          <p:cNvPr id="91" name="TextBox 90"/>
+              <a:t>connected-ERP share</a:t>
+            </a:r>
+          </a:p>
+        </p:txBody>
+      </p:sp>
+      <p:sp>
+        <p:nvSpPr>
+          <p:cNvPr id="85" name="TextBox 84"/>
           <p:cNvSpPr txBox="1"/>
           <p:nvPr/>
         </p:nvSpPr>
@@ -33887,7 +33737,7 @@
       </p:sp>
       <p:sp>
         <p:nvSpPr>
-          <p:cNvPr id="92" name="Rectangle 91"/>
+          <p:cNvPr id="86" name="Rectangle 85"/>
           <p:cNvSpPr/>
           <p:nvPr/>
         </p:nvSpPr>
@@ -33918,7 +33768,7 @@
       </p:sp>
       <p:sp>
         <p:nvSpPr>
-          <p:cNvPr id="93" name="TextBox 92"/>
+          <p:cNvPr id="87" name="TextBox 86"/>
           <p:cNvSpPr txBox="1"/>
           <p:nvPr/>
         </p:nvSpPr>
@@ -33957,7 +33807,7 @@
       </p:sp>
       <p:sp>
         <p:nvSpPr>
-          <p:cNvPr id="94" name="TextBox 93"/>
+          <p:cNvPr id="88" name="TextBox 87"/>
           <p:cNvSpPr txBox="1"/>
           <p:nvPr/>
         </p:nvSpPr>

--- a/outputs/pie-investor-deck.pptx
+++ b/outputs/pie-investor-deck.pptx
@@ -9749,7 +9749,7 @@
         <p:spPr>
           <a:xfrm>
             <a:off x="914400" y="2157983"/>
-            <a:ext cx="1589989" cy="420624"/>
+            <a:ext cx="1589989" cy="384048"/>
           </a:xfrm>
           <a:prstGeom prst="rect">
             <a:avLst/>
@@ -9779,7 +9779,7 @@
         <p:spPr>
           <a:xfrm>
             <a:off x="978408" y="2203703"/>
-            <a:ext cx="1461973" cy="329184"/>
+            <a:ext cx="1461973" cy="292607"/>
           </a:xfrm>
           <a:prstGeom prst="rect">
             <a:avLst/>
@@ -9804,7 +9804,7 @@
                 </a:solidFill>
                 <a:latin typeface="IBM Plex Mono"/>
               </a:rPr>
-              <a:t>&gt; 5,000 SKUs</a:t>
+              <a:t>High SKU count</a:t>
             </a:r>
           </a:p>
         </p:txBody>
@@ -9818,7 +9818,7 @@
         <p:spPr>
           <a:xfrm>
             <a:off x="2668981" y="2157983"/>
-            <a:ext cx="1589989" cy="420624"/>
+            <a:ext cx="1589989" cy="384048"/>
           </a:xfrm>
           <a:prstGeom prst="rect">
             <a:avLst/>
@@ -9848,7 +9848,7 @@
         <p:spPr>
           <a:xfrm>
             <a:off x="2732989" y="2203703"/>
-            <a:ext cx="1461973" cy="329184"/>
+            <a:ext cx="1461973" cy="292607"/>
           </a:xfrm>
           <a:prstGeom prst="rect">
             <a:avLst/>
@@ -9873,7 +9873,7 @@
                 </a:solidFill>
                 <a:latin typeface="IBM Plex Mono"/>
               </a:rPr>
-              <a:t>Encoded geometry</a:t>
+              <a:t>Technically complex</a:t>
             </a:r>
           </a:p>
         </p:txBody>
@@ -9887,7 +9887,7 @@
         <p:spPr>
           <a:xfrm>
             <a:off x="4423562" y="2157983"/>
-            <a:ext cx="1589989" cy="420624"/>
+            <a:ext cx="1589989" cy="384048"/>
           </a:xfrm>
           <a:prstGeom prst="rect">
             <a:avLst/>
@@ -9917,7 +9917,7 @@
         <p:spPr>
           <a:xfrm>
             <a:off x="4487570" y="2203703"/>
-            <a:ext cx="1461973" cy="329184"/>
+            <a:ext cx="1461973" cy="292607"/>
           </a:xfrm>
           <a:prstGeom prst="rect">
             <a:avLst/>
@@ -9942,7 +9942,7 @@
                 </a:solidFill>
                 <a:latin typeface="IBM Plex Mono"/>
               </a:rPr>
-              <a:t>&gt; 150 lines/month</a:t>
+              <a:t>Quote volume</a:t>
             </a:r>
           </a:p>
         </p:txBody>
@@ -9956,7 +9956,7 @@
         <p:spPr>
           <a:xfrm>
             <a:off x="6178143" y="2157983"/>
-            <a:ext cx="1589989" cy="420624"/>
+            <a:ext cx="1589989" cy="384048"/>
           </a:xfrm>
           <a:prstGeom prst="rect">
             <a:avLst/>
@@ -9986,7 +9986,7 @@
         <p:spPr>
           <a:xfrm>
             <a:off x="6242151" y="2203703"/>
-            <a:ext cx="1461973" cy="329184"/>
+            <a:ext cx="1461973" cy="292607"/>
           </a:xfrm>
           <a:prstGeom prst="rect">
             <a:avLst/>
@@ -10011,7 +10011,7 @@
                 </a:solidFill>
                 <a:latin typeface="IBM Plex Mono"/>
               </a:rPr>
-              <a:t>Margin &lt; 25%</a:t>
+              <a:t>Margin-sensitive</a:t>
             </a:r>
           </a:p>
         </p:txBody>
@@ -10025,7 +10025,7 @@
         <p:spPr>
           <a:xfrm>
             <a:off x="7932724" y="2157983"/>
-            <a:ext cx="1589989" cy="420624"/>
+            <a:ext cx="1589989" cy="384048"/>
           </a:xfrm>
           <a:prstGeom prst="rect">
             <a:avLst/>
@@ -10055,7 +10055,7 @@
         <p:spPr>
           <a:xfrm>
             <a:off x="7996732" y="2203703"/>
-            <a:ext cx="1461973" cy="329184"/>
+            <a:ext cx="1461973" cy="292607"/>
           </a:xfrm>
           <a:prstGeom prst="rect">
             <a:avLst/>
@@ -10080,7 +10080,7 @@
                 </a:solidFill>
                 <a:latin typeface="IBM Plex Mono"/>
               </a:rPr>
-              <a:t>3–30 quoting</a:t>
+              <a:t>Hours lost searching</a:t>
             </a:r>
           </a:p>
         </p:txBody>
@@ -10094,7 +10094,7 @@
         <p:spPr>
           <a:xfrm>
             <a:off x="9687306" y="2157983"/>
-            <a:ext cx="1589989" cy="420624"/>
+            <a:ext cx="1589989" cy="384048"/>
           </a:xfrm>
           <a:prstGeom prst="rect">
             <a:avLst/>
@@ -10124,7 +10124,7 @@
         <p:spPr>
           <a:xfrm>
             <a:off x="9751314" y="2203703"/>
-            <a:ext cx="1461973" cy="329184"/>
+            <a:ext cx="1461973" cy="292607"/>
           </a:xfrm>
           <a:prstGeom prst="rect">
             <a:avLst/>
@@ -10162,7 +10162,46 @@
         </p:nvSpPr>
         <p:spPr>
           <a:xfrm>
-            <a:off x="914400" y="2788920"/>
+            <a:off x="914400" y="2633472"/>
+            <a:ext cx="10362895" cy="256032"/>
+          </a:xfrm>
+          <a:prstGeom prst="rect">
+            <a:avLst/>
+          </a:prstGeom>
+          <a:noFill/>
+        </p:spPr>
+        <p:txBody>
+          <a:bodyPr wrap="square" anchor="t" lIns="0" rIns="0" tIns="0" bIns="0">
+            <a:spAutoFit/>
+          </a:bodyPr>
+          <a:lstStyle/>
+          <a:p>
+            <a:pPr algn="l">
+              <a:lnSpc>
+                <a:spcPct val="115000"/>
+              </a:lnSpc>
+            </a:pPr>
+            <a:r>
+              <a:rPr sz="1250" b="0">
+                <a:solidFill>
+                  <a:srgbClr val="313337"/>
+                </a:solidFill>
+                <a:latin typeface="IBM Plex Sans"/>
+              </a:rPr>
+              <a:t>The pain is the convergence, not one signal.</a:t>
+            </a:r>
+          </a:p>
+        </p:txBody>
+      </p:sp>
+      <p:sp>
+        <p:nvSpPr>
+          <p:cNvPr id="64" name="TextBox 63"/>
+          <p:cNvSpPr txBox="1"/>
+          <p:nvPr/>
+        </p:nvSpPr>
+        <p:spPr>
+          <a:xfrm>
+            <a:off x="914400" y="3072384"/>
             <a:ext cx="4572000" cy="219456"/>
           </a:xfrm>
           <a:prstGeom prst="rect">
@@ -10195,13 +10234,13 @@
       </p:sp>
       <p:sp>
         <p:nvSpPr>
-          <p:cNvPr id="64" name="TextBox 63"/>
+          <p:cNvPr id="65" name="TextBox 64"/>
           <p:cNvSpPr txBox="1"/>
           <p:nvPr/>
         </p:nvSpPr>
         <p:spPr>
           <a:xfrm>
-            <a:off x="914400" y="3026663"/>
+            <a:off x="914400" y="3291839"/>
             <a:ext cx="10362895" cy="310896"/>
           </a:xfrm>
           <a:prstGeom prst="rect">
@@ -10227,20 +10266,20 @@
                 </a:solidFill>
                 <a:latin typeface="IBM Plex Sans"/>
               </a:rPr>
-              <a:t>Founder-led. Owner or sales head, triggered by a price increase or a departing expert. Diagnostic before demo.</a:t>
-            </a:r>
-          </a:p>
-        </p:txBody>
-      </p:sp>
-      <p:sp>
-        <p:nvSpPr>
-          <p:cNvPr id="65" name="TextBox 64"/>
+              <a:t>Founder-led. Owner or sales head, triggered by a price increase or a departing expert.</a:t>
+            </a:r>
+          </a:p>
+        </p:txBody>
+      </p:sp>
+      <p:sp>
+        <p:nvSpPr>
+          <p:cNvPr id="66" name="TextBox 65"/>
           <p:cNvSpPr txBox="1"/>
           <p:nvPr/>
         </p:nvSpPr>
         <p:spPr>
           <a:xfrm>
-            <a:off x="914400" y="3483863"/>
+            <a:off x="914400" y="3749039"/>
             <a:ext cx="4572000" cy="219456"/>
           </a:xfrm>
           <a:prstGeom prst="rect">
@@ -10273,13 +10312,13 @@
       </p:sp>
       <p:sp>
         <p:nvSpPr>
-          <p:cNvPr id="66" name="Rectangle 65"/>
+          <p:cNvPr id="67" name="Rectangle 66"/>
           <p:cNvSpPr/>
           <p:nvPr/>
         </p:nvSpPr>
         <p:spPr>
           <a:xfrm>
-            <a:off x="914400" y="3703320"/>
+            <a:off x="914400" y="3968496"/>
             <a:ext cx="1529029" cy="512064"/>
           </a:xfrm>
           <a:prstGeom prst="rect">
@@ -10303,13 +10342,13 @@
       </p:sp>
       <p:sp>
         <p:nvSpPr>
-          <p:cNvPr id="67" name="TextBox 66"/>
+          <p:cNvPr id="68" name="TextBox 67"/>
           <p:cNvSpPr txBox="1"/>
           <p:nvPr/>
         </p:nvSpPr>
         <p:spPr>
           <a:xfrm>
-            <a:off x="978408" y="3749039"/>
+            <a:off x="978408" y="4014215"/>
             <a:ext cx="1401013" cy="420624"/>
           </a:xfrm>
           <a:prstGeom prst="rect">
@@ -10342,13 +10381,13 @@
       </p:sp>
       <p:cxnSp>
         <p:nvCxnSpPr>
-          <p:cNvPr id="68" name="Connector 67"/>
-          <p:cNvCxnSpPr/>
-          <p:nvPr/>
-        </p:nvCxnSpPr>
-        <p:spPr>
-          <a:xfrm>
-            <a:off x="2443429" y="3959352"/>
+          <p:cNvPr id="69" name="Connector 68"/>
+          <p:cNvCxnSpPr/>
+          <p:nvPr/>
+        </p:nvCxnSpPr>
+        <p:spPr>
+          <a:xfrm>
+            <a:off x="2443429" y="4224527"/>
             <a:ext cx="237744" cy="0"/>
           </a:xfrm>
           <a:prstGeom prst="line">
@@ -10365,13 +10404,13 @@
       </p:cxnSp>
       <p:sp>
         <p:nvSpPr>
-          <p:cNvPr id="69" name="Rectangle 68"/>
+          <p:cNvPr id="70" name="Rectangle 69"/>
           <p:cNvSpPr/>
           <p:nvPr/>
         </p:nvSpPr>
         <p:spPr>
           <a:xfrm>
-            <a:off x="2681173" y="3703320"/>
+            <a:off x="2681173" y="3968496"/>
             <a:ext cx="1529029" cy="512064"/>
           </a:xfrm>
           <a:prstGeom prst="rect">
@@ -10395,13 +10434,13 @@
       </p:sp>
       <p:sp>
         <p:nvSpPr>
-          <p:cNvPr id="70" name="TextBox 69"/>
+          <p:cNvPr id="71" name="TextBox 70"/>
           <p:cNvSpPr txBox="1"/>
           <p:nvPr/>
         </p:nvSpPr>
         <p:spPr>
           <a:xfrm>
-            <a:off x="2745181" y="3749039"/>
+            <a:off x="2745181" y="4014215"/>
             <a:ext cx="1401013" cy="420624"/>
           </a:xfrm>
           <a:prstGeom prst="rect">
@@ -10450,13 +10489,13 @@
       </p:sp>
       <p:cxnSp>
         <p:nvCxnSpPr>
-          <p:cNvPr id="71" name="Connector 70"/>
-          <p:cNvCxnSpPr/>
-          <p:nvPr/>
-        </p:nvCxnSpPr>
-        <p:spPr>
-          <a:xfrm>
-            <a:off x="4210202" y="3959352"/>
+          <p:cNvPr id="72" name="Connector 71"/>
+          <p:cNvCxnSpPr/>
+          <p:nvPr/>
+        </p:nvCxnSpPr>
+        <p:spPr>
+          <a:xfrm>
+            <a:off x="4210202" y="4224527"/>
             <a:ext cx="237744" cy="0"/>
           </a:xfrm>
           <a:prstGeom prst="line">
@@ -10473,13 +10512,13 @@
       </p:cxnSp>
       <p:sp>
         <p:nvSpPr>
-          <p:cNvPr id="72" name="Rectangle 71"/>
+          <p:cNvPr id="73" name="Rectangle 72"/>
           <p:cNvSpPr/>
           <p:nvPr/>
         </p:nvSpPr>
         <p:spPr>
           <a:xfrm>
-            <a:off x="4447946" y="3703320"/>
+            <a:off x="4447946" y="3968496"/>
             <a:ext cx="1529029" cy="512064"/>
           </a:xfrm>
           <a:prstGeom prst="rect">
@@ -10503,13 +10542,13 @@
       </p:sp>
       <p:sp>
         <p:nvSpPr>
-          <p:cNvPr id="73" name="TextBox 72"/>
+          <p:cNvPr id="74" name="TextBox 73"/>
           <p:cNvSpPr txBox="1"/>
           <p:nvPr/>
         </p:nvSpPr>
         <p:spPr>
           <a:xfrm>
-            <a:off x="4511954" y="3749039"/>
+            <a:off x="4511954" y="4014215"/>
             <a:ext cx="1401013" cy="420624"/>
           </a:xfrm>
           <a:prstGeom prst="rect">
@@ -10542,13 +10581,13 @@
       </p:sp>
       <p:cxnSp>
         <p:nvCxnSpPr>
-          <p:cNvPr id="74" name="Connector 73"/>
-          <p:cNvCxnSpPr/>
-          <p:nvPr/>
-        </p:nvCxnSpPr>
-        <p:spPr>
-          <a:xfrm>
-            <a:off x="5976975" y="3959352"/>
+          <p:cNvPr id="75" name="Connector 74"/>
+          <p:cNvCxnSpPr/>
+          <p:nvPr/>
+        </p:nvCxnSpPr>
+        <p:spPr>
+          <a:xfrm>
+            <a:off x="5976975" y="4224527"/>
             <a:ext cx="237744" cy="0"/>
           </a:xfrm>
           <a:prstGeom prst="line">
@@ -10565,13 +10604,13 @@
       </p:cxnSp>
       <p:sp>
         <p:nvSpPr>
-          <p:cNvPr id="75" name="Rectangle 74"/>
+          <p:cNvPr id="76" name="Rectangle 75"/>
           <p:cNvSpPr/>
           <p:nvPr/>
         </p:nvSpPr>
         <p:spPr>
           <a:xfrm>
-            <a:off x="6214719" y="3703320"/>
+            <a:off x="6214719" y="3968496"/>
             <a:ext cx="1529029" cy="512064"/>
           </a:xfrm>
           <a:prstGeom prst="rect">
@@ -10595,13 +10634,13 @@
       </p:sp>
       <p:sp>
         <p:nvSpPr>
-          <p:cNvPr id="76" name="TextBox 75"/>
+          <p:cNvPr id="77" name="TextBox 76"/>
           <p:cNvSpPr txBox="1"/>
           <p:nvPr/>
         </p:nvSpPr>
         <p:spPr>
           <a:xfrm>
-            <a:off x="6278727" y="3749039"/>
+            <a:off x="6278727" y="4014215"/>
             <a:ext cx="1401013" cy="420624"/>
           </a:xfrm>
           <a:prstGeom prst="rect">
@@ -10650,13 +10689,13 @@
       </p:sp>
       <p:cxnSp>
         <p:nvCxnSpPr>
-          <p:cNvPr id="77" name="Connector 76"/>
-          <p:cNvCxnSpPr/>
-          <p:nvPr/>
-        </p:nvCxnSpPr>
-        <p:spPr>
-          <a:xfrm>
-            <a:off x="7743748" y="3959352"/>
+          <p:cNvPr id="78" name="Connector 77"/>
+          <p:cNvCxnSpPr/>
+          <p:nvPr/>
+        </p:nvCxnSpPr>
+        <p:spPr>
+          <a:xfrm>
+            <a:off x="7743748" y="4224527"/>
             <a:ext cx="237744" cy="0"/>
           </a:xfrm>
           <a:prstGeom prst="line">
@@ -10673,13 +10712,13 @@
       </p:cxnSp>
       <p:sp>
         <p:nvSpPr>
-          <p:cNvPr id="78" name="Rectangle 77"/>
+          <p:cNvPr id="79" name="Rectangle 78"/>
           <p:cNvSpPr/>
           <p:nvPr/>
         </p:nvSpPr>
         <p:spPr>
           <a:xfrm>
-            <a:off x="7981492" y="3703320"/>
+            <a:off x="7981492" y="3968496"/>
             <a:ext cx="1529029" cy="512064"/>
           </a:xfrm>
           <a:prstGeom prst="rect">
@@ -10703,13 +10742,13 @@
       </p:sp>
       <p:sp>
         <p:nvSpPr>
-          <p:cNvPr id="79" name="TextBox 78"/>
+          <p:cNvPr id="80" name="TextBox 79"/>
           <p:cNvSpPr txBox="1"/>
           <p:nvPr/>
         </p:nvSpPr>
         <p:spPr>
           <a:xfrm>
-            <a:off x="8045500" y="3749039"/>
+            <a:off x="8045500" y="4014215"/>
             <a:ext cx="1401013" cy="420624"/>
           </a:xfrm>
           <a:prstGeom prst="rect">
@@ -10742,13 +10781,13 @@
       </p:sp>
       <p:cxnSp>
         <p:nvCxnSpPr>
-          <p:cNvPr id="80" name="Connector 79"/>
-          <p:cNvCxnSpPr/>
-          <p:nvPr/>
-        </p:nvCxnSpPr>
-        <p:spPr>
-          <a:xfrm>
-            <a:off x="9510521" y="3959352"/>
+          <p:cNvPr id="81" name="Connector 80"/>
+          <p:cNvCxnSpPr/>
+          <p:nvPr/>
+        </p:nvCxnSpPr>
+        <p:spPr>
+          <a:xfrm>
+            <a:off x="9510521" y="4224527"/>
             <a:ext cx="237744" cy="0"/>
           </a:xfrm>
           <a:prstGeom prst="line">
@@ -10765,13 +10804,13 @@
       </p:cxnSp>
       <p:sp>
         <p:nvSpPr>
-          <p:cNvPr id="81" name="Rectangle 80"/>
+          <p:cNvPr id="82" name="Rectangle 81"/>
           <p:cNvSpPr/>
           <p:nvPr/>
         </p:nvSpPr>
         <p:spPr>
           <a:xfrm>
-            <a:off x="9748266" y="3703320"/>
+            <a:off x="9748266" y="3968496"/>
             <a:ext cx="1529029" cy="512064"/>
           </a:xfrm>
           <a:prstGeom prst="rect">
@@ -10795,13 +10834,13 @@
       </p:sp>
       <p:sp>
         <p:nvSpPr>
-          <p:cNvPr id="82" name="TextBox 81"/>
+          <p:cNvPr id="83" name="TextBox 82"/>
           <p:cNvSpPr txBox="1"/>
           <p:nvPr/>
         </p:nvSpPr>
         <p:spPr>
           <a:xfrm>
-            <a:off x="9812274" y="3749039"/>
+            <a:off x="9812274" y="4014215"/>
             <a:ext cx="1401013" cy="420624"/>
           </a:xfrm>
           <a:prstGeom prst="rect">
@@ -10850,13 +10889,13 @@
       </p:sp>
       <p:sp>
         <p:nvSpPr>
-          <p:cNvPr id="83" name="TextBox 82"/>
+          <p:cNvPr id="84" name="TextBox 83"/>
           <p:cNvSpPr txBox="1"/>
           <p:nvPr/>
         </p:nvSpPr>
         <p:spPr>
           <a:xfrm>
-            <a:off x="914400" y="4306824"/>
+            <a:off x="914400" y="4572000"/>
             <a:ext cx="10362895" cy="274320"/>
           </a:xfrm>
           <a:prstGeom prst="rect">
@@ -10882,20 +10921,20 @@
                 </a:solidFill>
                 <a:latin typeface="IBM Plex Sans"/>
               </a:rPr>
-              <a:t>Rung one ships free; the paid tier is built, not yet sold.</a:t>
-            </a:r>
-          </a:p>
-        </p:txBody>
-      </p:sp>
-      <p:sp>
-        <p:nvSpPr>
-          <p:cNvPr id="84" name="TextBox 83"/>
+              <a:t>Rung one ships free; the paid tier is built, unsold.</a:t>
+            </a:r>
+          </a:p>
+        </p:txBody>
+      </p:sp>
+      <p:sp>
+        <p:nvSpPr>
+          <p:cNvPr id="85" name="TextBox 84"/>
           <p:cNvSpPr txBox="1"/>
           <p:nvPr/>
         </p:nvSpPr>
         <p:spPr>
           <a:xfrm>
-            <a:off x="914400" y="4892040"/>
+            <a:off x="914400" y="5010912"/>
             <a:ext cx="4572000" cy="219456"/>
           </a:xfrm>
           <a:prstGeom prst="rect">
@@ -10928,13 +10967,13 @@
       </p:sp>
       <p:cxnSp>
         <p:nvCxnSpPr>
-          <p:cNvPr id="85" name="Connector 84"/>
-          <p:cNvCxnSpPr/>
-          <p:nvPr/>
-        </p:nvCxnSpPr>
-        <p:spPr>
-          <a:xfrm>
-            <a:off x="914400" y="5093207"/>
+          <p:cNvPr id="86" name="Connector 85"/>
+          <p:cNvCxnSpPr/>
+          <p:nvPr/>
+        </p:nvCxnSpPr>
+        <p:spPr>
+          <a:xfrm>
+            <a:off x="914400" y="5212080"/>
             <a:ext cx="10362895" cy="0"/>
           </a:xfrm>
           <a:prstGeom prst="line">
@@ -10950,13 +10989,13 @@
       </p:cxnSp>
       <p:sp>
         <p:nvSpPr>
-          <p:cNvPr id="86" name="TextBox 85"/>
+          <p:cNvPr id="87" name="TextBox 86"/>
           <p:cNvSpPr txBox="1"/>
           <p:nvPr/>
         </p:nvSpPr>
         <p:spPr>
           <a:xfrm>
-            <a:off x="914400" y="5202936"/>
+            <a:off x="914400" y="5321808"/>
             <a:ext cx="2384983" cy="256032"/>
           </a:xfrm>
           <a:prstGeom prst="rect">
@@ -10989,13 +11028,13 @@
       </p:sp>
       <p:sp>
         <p:nvSpPr>
-          <p:cNvPr id="87" name="Rectangle 86"/>
+          <p:cNvPr id="88" name="Rectangle 87"/>
           <p:cNvSpPr/>
           <p:nvPr/>
         </p:nvSpPr>
         <p:spPr>
           <a:xfrm>
-            <a:off x="914400" y="5495544"/>
+            <a:off x="914400" y="5614416"/>
             <a:ext cx="1353312" cy="292608"/>
           </a:xfrm>
           <a:prstGeom prst="rect">
@@ -11020,13 +11059,13 @@
       </p:sp>
       <p:sp>
         <p:nvSpPr>
-          <p:cNvPr id="88" name="TextBox 87"/>
+          <p:cNvPr id="89" name="TextBox 88"/>
           <p:cNvSpPr txBox="1"/>
           <p:nvPr/>
         </p:nvSpPr>
         <p:spPr>
           <a:xfrm>
-            <a:off x="996696" y="5550407"/>
+            <a:off x="996696" y="5669280"/>
             <a:ext cx="1188720" cy="182880"/>
           </a:xfrm>
           <a:prstGeom prst="rect">
@@ -11059,13 +11098,13 @@
       </p:sp>
       <p:sp>
         <p:nvSpPr>
-          <p:cNvPr id="89" name="TextBox 88"/>
+          <p:cNvPr id="90" name="TextBox 89"/>
           <p:cNvSpPr txBox="1"/>
           <p:nvPr/>
         </p:nvSpPr>
         <p:spPr>
           <a:xfrm>
-            <a:off x="3573703" y="5202936"/>
+            <a:off x="3573703" y="5321808"/>
             <a:ext cx="2384983" cy="256032"/>
           </a:xfrm>
           <a:prstGeom prst="rect">
@@ -11098,13 +11137,13 @@
       </p:sp>
       <p:sp>
         <p:nvSpPr>
-          <p:cNvPr id="90" name="Rectangle 89"/>
+          <p:cNvPr id="91" name="Rectangle 90"/>
           <p:cNvSpPr/>
           <p:nvPr/>
         </p:nvSpPr>
         <p:spPr>
           <a:xfrm>
-            <a:off x="3573703" y="5495544"/>
+            <a:off x="3573703" y="5614416"/>
             <a:ext cx="1353312" cy="292608"/>
           </a:xfrm>
           <a:prstGeom prst="rect">
@@ -11129,13 +11168,13 @@
       </p:sp>
       <p:sp>
         <p:nvSpPr>
-          <p:cNvPr id="91" name="TextBox 90"/>
+          <p:cNvPr id="92" name="TextBox 91"/>
           <p:cNvSpPr txBox="1"/>
           <p:nvPr/>
         </p:nvSpPr>
         <p:spPr>
           <a:xfrm>
-            <a:off x="3655999" y="5550407"/>
+            <a:off x="3655999" y="5669280"/>
             <a:ext cx="1188720" cy="182880"/>
           </a:xfrm>
           <a:prstGeom prst="rect">
@@ -11168,13 +11207,13 @@
       </p:sp>
       <p:sp>
         <p:nvSpPr>
-          <p:cNvPr id="92" name="TextBox 91"/>
+          <p:cNvPr id="93" name="TextBox 92"/>
           <p:cNvSpPr txBox="1"/>
           <p:nvPr/>
         </p:nvSpPr>
         <p:spPr>
           <a:xfrm>
-            <a:off x="6233007" y="5202936"/>
+            <a:off x="6233007" y="5321808"/>
             <a:ext cx="2384983" cy="256032"/>
           </a:xfrm>
           <a:prstGeom prst="rect">
@@ -11207,13 +11246,13 @@
       </p:sp>
       <p:sp>
         <p:nvSpPr>
-          <p:cNvPr id="93" name="Rectangle 92"/>
+          <p:cNvPr id="94" name="Rectangle 93"/>
           <p:cNvSpPr/>
           <p:nvPr/>
         </p:nvSpPr>
         <p:spPr>
           <a:xfrm>
-            <a:off x="6233007" y="5495544"/>
+            <a:off x="6233007" y="5614416"/>
             <a:ext cx="1353312" cy="292608"/>
           </a:xfrm>
           <a:prstGeom prst="rect">
@@ -11238,13 +11277,13 @@
       </p:sp>
       <p:sp>
         <p:nvSpPr>
-          <p:cNvPr id="94" name="TextBox 93"/>
+          <p:cNvPr id="95" name="TextBox 94"/>
           <p:cNvSpPr txBox="1"/>
           <p:nvPr/>
         </p:nvSpPr>
         <p:spPr>
           <a:xfrm>
-            <a:off x="6315303" y="5550407"/>
+            <a:off x="6315303" y="5669280"/>
             <a:ext cx="1188720" cy="182880"/>
           </a:xfrm>
           <a:prstGeom prst="rect">
@@ -11277,13 +11316,13 @@
       </p:sp>
       <p:sp>
         <p:nvSpPr>
-          <p:cNvPr id="95" name="TextBox 94"/>
+          <p:cNvPr id="96" name="TextBox 95"/>
           <p:cNvSpPr txBox="1"/>
           <p:nvPr/>
         </p:nvSpPr>
         <p:spPr>
           <a:xfrm>
-            <a:off x="8892311" y="5202936"/>
+            <a:off x="8892311" y="5321808"/>
             <a:ext cx="2384983" cy="256032"/>
           </a:xfrm>
           <a:prstGeom prst="rect">
@@ -11316,13 +11355,13 @@
       </p:sp>
       <p:sp>
         <p:nvSpPr>
-          <p:cNvPr id="96" name="Rectangle 95"/>
+          <p:cNvPr id="97" name="Rectangle 96"/>
           <p:cNvSpPr/>
           <p:nvPr/>
         </p:nvSpPr>
         <p:spPr>
           <a:xfrm>
-            <a:off x="8892311" y="5495544"/>
+            <a:off x="8892311" y="5614416"/>
             <a:ext cx="1353312" cy="292608"/>
           </a:xfrm>
           <a:prstGeom prst="rect">
@@ -11347,13 +11386,13 @@
       </p:sp>
       <p:sp>
         <p:nvSpPr>
-          <p:cNvPr id="97" name="TextBox 96"/>
+          <p:cNvPr id="98" name="TextBox 97"/>
           <p:cNvSpPr txBox="1"/>
           <p:nvPr/>
         </p:nvSpPr>
         <p:spPr>
           <a:xfrm>
-            <a:off x="8974607" y="5550407"/>
+            <a:off x="8974607" y="5669280"/>
             <a:ext cx="1188720" cy="182880"/>
           </a:xfrm>
           <a:prstGeom prst="rect">
@@ -32464,8 +32503,8 @@
         </p:nvSpPr>
         <p:spPr>
           <a:xfrm>
-            <a:off x="914400" y="2240279"/>
-            <a:ext cx="2788920" cy="384048"/>
+            <a:off x="914400" y="2203703"/>
+            <a:ext cx="2788920" cy="338328"/>
           </a:xfrm>
           <a:prstGeom prst="rect">
             <a:avLst/>
@@ -32494,8 +32533,8 @@
         </p:nvSpPr>
         <p:spPr>
           <a:xfrm>
-            <a:off x="978408" y="2285999"/>
-            <a:ext cx="2660903" cy="292607"/>
+            <a:off x="978408" y="2249423"/>
+            <a:ext cx="2660903" cy="246888"/>
           </a:xfrm>
           <a:prstGeom prst="rect">
             <a:avLst/>
@@ -32533,8 +32572,8 @@
         </p:nvSpPr>
         <p:spPr>
           <a:xfrm>
-            <a:off x="914400" y="2715768"/>
-            <a:ext cx="2788920" cy="384048"/>
+            <a:off x="914400" y="2624327"/>
+            <a:ext cx="2788920" cy="338328"/>
           </a:xfrm>
           <a:prstGeom prst="rect">
             <a:avLst/>
@@ -32563,8 +32602,8 @@
         </p:nvSpPr>
         <p:spPr>
           <a:xfrm>
-            <a:off x="978408" y="2761487"/>
-            <a:ext cx="2660903" cy="292607"/>
+            <a:off x="978408" y="2670047"/>
+            <a:ext cx="2660903" cy="246888"/>
           </a:xfrm>
           <a:prstGeom prst="rect">
             <a:avLst/>
@@ -32602,8 +32641,8 @@
         </p:nvCxnSpPr>
         <p:spPr>
           <a:xfrm>
-            <a:off x="2308860" y="2624327"/>
-            <a:ext cx="0" cy="91441"/>
+            <a:off x="2308860" y="2542032"/>
+            <a:ext cx="0" cy="82295"/>
           </a:xfrm>
           <a:prstGeom prst="line">
             <a:avLst/>
@@ -32624,8 +32663,8 @@
         </p:nvSpPr>
         <p:spPr>
           <a:xfrm>
-            <a:off x="914400" y="3191256"/>
-            <a:ext cx="2788920" cy="384048"/>
+            <a:off x="914400" y="3044951"/>
+            <a:ext cx="2788920" cy="338328"/>
           </a:xfrm>
           <a:prstGeom prst="rect">
             <a:avLst/>
@@ -32654,8 +32693,8 @@
         </p:nvSpPr>
         <p:spPr>
           <a:xfrm>
-            <a:off x="978408" y="3236975"/>
-            <a:ext cx="2660903" cy="292607"/>
+            <a:off x="978408" y="3090671"/>
+            <a:ext cx="2660903" cy="246888"/>
           </a:xfrm>
           <a:prstGeom prst="rect">
             <a:avLst/>
@@ -32680,7 +32719,7 @@
                 </a:solidFill>
                 <a:latin typeface="IBM Plex Mono"/>
               </a:rPr>
-              <a:t>Power transmission</a:t>
+              <a:t>Electrical</a:t>
             </a:r>
           </a:p>
         </p:txBody>
@@ -32693,8 +32732,8 @@
         </p:nvCxnSpPr>
         <p:spPr>
           <a:xfrm>
-            <a:off x="2308860" y="3099815"/>
-            <a:ext cx="0" cy="91441"/>
+            <a:off x="2308860" y="2962656"/>
+            <a:ext cx="0" cy="82295"/>
           </a:xfrm>
           <a:prstGeom prst="line">
             <a:avLst/>
@@ -32715,8 +32754,8 @@
         </p:nvSpPr>
         <p:spPr>
           <a:xfrm>
-            <a:off x="914400" y="3666744"/>
-            <a:ext cx="2788920" cy="384048"/>
+            <a:off x="914400" y="3465576"/>
+            <a:ext cx="2788920" cy="338328"/>
           </a:xfrm>
           <a:prstGeom prst="rect">
             <a:avLst/>
@@ -32745,8 +32784,8 @@
         </p:nvSpPr>
         <p:spPr>
           <a:xfrm>
-            <a:off x="978408" y="3712463"/>
-            <a:ext cx="2660903" cy="292607"/>
+            <a:off x="978408" y="3511296"/>
+            <a:ext cx="2660903" cy="246888"/>
           </a:xfrm>
           <a:prstGeom prst="rect">
             <a:avLst/>
@@ -32771,7 +32810,7 @@
                 </a:solidFill>
                 <a:latin typeface="IBM Plex Mono"/>
               </a:rPr>
-              <a:t>Hydraulics, pneumatics</a:t>
+              <a:t>MRO</a:t>
             </a:r>
           </a:p>
         </p:txBody>
@@ -32784,8 +32823,8 @@
         </p:nvCxnSpPr>
         <p:spPr>
           <a:xfrm>
-            <a:off x="2308860" y="3575303"/>
-            <a:ext cx="0" cy="91441"/>
+            <a:off x="2308860" y="3383280"/>
+            <a:ext cx="0" cy="82296"/>
           </a:xfrm>
           <a:prstGeom prst="line">
             <a:avLst/>
@@ -32806,8 +32845,8 @@
         </p:nvSpPr>
         <p:spPr>
           <a:xfrm>
-            <a:off x="914400" y="4142231"/>
-            <a:ext cx="2788920" cy="384048"/>
+            <a:off x="914400" y="3886200"/>
+            <a:ext cx="2788920" cy="338328"/>
           </a:xfrm>
           <a:prstGeom prst="rect">
             <a:avLst/>
@@ -32836,8 +32875,8 @@
         </p:nvSpPr>
         <p:spPr>
           <a:xfrm>
-            <a:off x="978408" y="4187951"/>
-            <a:ext cx="2660903" cy="292607"/>
+            <a:off x="978408" y="3931920"/>
+            <a:ext cx="2660903" cy="246888"/>
           </a:xfrm>
           <a:prstGeom prst="rect">
             <a:avLst/>
@@ -32862,7 +32901,7 @@
                 </a:solidFill>
                 <a:latin typeface="IBM Plex Mono"/>
               </a:rPr>
-              <a:t>Abrasives</a:t>
+              <a:t>Automation</a:t>
             </a:r>
           </a:p>
         </p:txBody>
@@ -32875,8 +32914,8 @@
         </p:nvCxnSpPr>
         <p:spPr>
           <a:xfrm>
-            <a:off x="2308860" y="4050791"/>
-            <a:ext cx="0" cy="91440"/>
+            <a:off x="2308860" y="3803904"/>
+            <a:ext cx="0" cy="82296"/>
           </a:xfrm>
           <a:prstGeom prst="line">
             <a:avLst/>
@@ -32897,8 +32936,8 @@
         </p:nvSpPr>
         <p:spPr>
           <a:xfrm>
-            <a:off x="914400" y="4617720"/>
-            <a:ext cx="2788920" cy="384048"/>
+            <a:off x="914400" y="4306824"/>
+            <a:ext cx="2788920" cy="338328"/>
           </a:xfrm>
           <a:prstGeom prst="rect">
             <a:avLst/>
@@ -32927,8 +32966,8 @@
         </p:nvSpPr>
         <p:spPr>
           <a:xfrm>
-            <a:off x="978408" y="4663440"/>
-            <a:ext cx="2660903" cy="292607"/>
+            <a:off x="978408" y="4352544"/>
+            <a:ext cx="2660903" cy="246888"/>
           </a:xfrm>
           <a:prstGeom prst="rect">
             <a:avLst/>
@@ -32953,7 +32992,7 @@
                 </a:solidFill>
                 <a:latin typeface="IBM Plex Mono"/>
               </a:rPr>
-              <a:t>Specialty fasteners</a:t>
+              <a:t>Fasteners</a:t>
             </a:r>
           </a:p>
         </p:txBody>
@@ -32966,8 +33005,8 @@
         </p:nvCxnSpPr>
         <p:spPr>
           <a:xfrm>
-            <a:off x="2308860" y="4526280"/>
-            <a:ext cx="0" cy="91440"/>
+            <a:off x="2308860" y="4224528"/>
+            <a:ext cx="0" cy="82296"/>
           </a:xfrm>
           <a:prstGeom prst="line">
             <a:avLst/>
@@ -32982,7 +33021,98 @@
       </p:cxnSp>
       <p:sp>
         <p:nvSpPr>
-          <p:cNvPr id="67" name="TextBox 66"/>
+          <p:cNvPr id="67" name="Rectangle 66"/>
+          <p:cNvSpPr/>
+          <p:nvPr/>
+        </p:nvSpPr>
+        <p:spPr>
+          <a:xfrm>
+            <a:off x="914400" y="4727448"/>
+            <a:ext cx="2788920" cy="338328"/>
+          </a:xfrm>
+          <a:prstGeom prst="rect">
+            <a:avLst/>
+          </a:prstGeom>
+          <a:noFill/>
+          <a:ln w="7620">
+            <a:solidFill>
+              <a:srgbClr val="1B4D7A"/>
+            </a:solidFill>
+          </a:ln>
+          <a:effectLst/>
+        </p:spPr>
+        <p:txBody>
+          <a:bodyPr rtlCol="0" anchor="ctr"/>
+          <a:lstStyle/>
+          <a:p>
+            <a:pPr algn="ctr"/>
+          </a:p>
+        </p:txBody>
+      </p:sp>
+      <p:sp>
+        <p:nvSpPr>
+          <p:cNvPr id="68" name="TextBox 67"/>
+          <p:cNvSpPr txBox="1"/>
+          <p:nvPr/>
+        </p:nvSpPr>
+        <p:spPr>
+          <a:xfrm>
+            <a:off x="978408" y="4773168"/>
+            <a:ext cx="2660903" cy="246888"/>
+          </a:xfrm>
+          <a:prstGeom prst="rect">
+            <a:avLst/>
+          </a:prstGeom>
+          <a:noFill/>
+        </p:spPr>
+        <p:txBody>
+          <a:bodyPr wrap="square" anchor="ctr" lIns="0" rIns="0" tIns="0" bIns="0">
+            <a:spAutoFit/>
+          </a:bodyPr>
+          <a:lstStyle/>
+          <a:p>
+            <a:pPr algn="ctr">
+              <a:lnSpc>
+                <a:spcPct val="112000"/>
+              </a:lnSpc>
+            </a:pPr>
+            <a:r>
+              <a:rPr sz="850" b="0">
+                <a:solidFill>
+                  <a:srgbClr val="313337"/>
+                </a:solidFill>
+                <a:latin typeface="IBM Plex Mono"/>
+              </a:rPr>
+              <a:t>Industrial consumables</a:t>
+            </a:r>
+          </a:p>
+        </p:txBody>
+      </p:sp>
+      <p:cxnSp>
+        <p:nvCxnSpPr>
+          <p:cNvPr id="69" name="Connector 68"/>
+          <p:cNvCxnSpPr/>
+          <p:nvPr/>
+        </p:nvCxnSpPr>
+        <p:spPr>
+          <a:xfrm>
+            <a:off x="2308860" y="4645152"/>
+            <a:ext cx="0" cy="82296"/>
+          </a:xfrm>
+          <a:prstGeom prst="line">
+            <a:avLst/>
+          </a:prstGeom>
+          <a:ln w="6350">
+            <a:solidFill>
+              <a:srgbClr val="A8A69E"/>
+            </a:solidFill>
+          </a:ln>
+          <a:effectLst/>
+        </p:spPr>
+      </p:cxnSp>
+      <p:sp>
+        <p:nvSpPr>
+          <p:cNvPr id="70" name="TextBox 69"/>
           <p:cNvSpPr txBox="1"/>
           <p:nvPr/>
         </p:nvSpPr>
@@ -33021,7 +33151,7 @@
       </p:sp>
       <p:sp>
         <p:nvSpPr>
-          <p:cNvPr id="68" name="TextBox 67"/>
+          <p:cNvPr id="71" name="TextBox 70"/>
           <p:cNvSpPr txBox="1"/>
           <p:nvPr/>
         </p:nvSpPr>
@@ -33053,7 +33183,7 @@
                 </a:solidFill>
                 <a:latin typeface="IBM Plex Sans"/>
               </a:rPr>
-              <a:t>Each rung: encoded codes, cross-brand substitution, a catalogue nobody memorises.</a:t>
+              <a:t>The same convergence recurs: many technical SKUs, constant quoting, margin pressure.</a:t>
             </a:r>
           </a:p>
           <a:p>
@@ -33092,7 +33222,7 @@
       </p:sp>
       <p:sp>
         <p:nvSpPr>
-          <p:cNvPr id="69" name="TextBox 68"/>
+          <p:cNvPr id="72" name="TextBox 71"/>
           <p:cNvSpPr txBox="1"/>
           <p:nvPr/>
         </p:nvSpPr>
@@ -33131,7 +33261,7 @@
       </p:sp>
       <p:sp>
         <p:nvSpPr>
-          <p:cNvPr id="70" name="Rectangle 69"/>
+          <p:cNvPr id="73" name="Rectangle 72"/>
           <p:cNvSpPr/>
           <p:nvPr/>
         </p:nvSpPr>
@@ -33161,7 +33291,7 @@
       </p:sp>
       <p:sp>
         <p:nvSpPr>
-          <p:cNvPr id="71" name="TextBox 70"/>
+          <p:cNvPr id="74" name="TextBox 73"/>
           <p:cNvSpPr txBox="1"/>
           <p:nvPr/>
         </p:nvSpPr>
@@ -33232,7 +33362,7 @@
       </p:sp>
       <p:cxnSp>
         <p:nvCxnSpPr>
-          <p:cNvPr id="72" name="Connector 71"/>
+          <p:cNvPr id="75" name="Connector 74"/>
           <p:cNvCxnSpPr/>
           <p:nvPr/>
         </p:nvCxnSpPr>
@@ -33254,7 +33384,7 @@
       </p:cxnSp>
       <p:sp>
         <p:nvSpPr>
-          <p:cNvPr id="73" name="TextBox 72"/>
+          <p:cNvPr id="76" name="TextBox 75"/>
           <p:cNvSpPr txBox="1"/>
           <p:nvPr/>
         </p:nvSpPr>
@@ -33293,7 +33423,7 @@
       </p:sp>
       <p:sp>
         <p:nvSpPr>
-          <p:cNvPr id="74" name="Rectangle 73"/>
+          <p:cNvPr id="77" name="Rectangle 76"/>
           <p:cNvSpPr/>
           <p:nvPr/>
         </p:nvSpPr>
@@ -33324,7 +33454,7 @@
       </p:sp>
       <p:sp>
         <p:nvSpPr>
-          <p:cNvPr id="75" name="TextBox 74"/>
+          <p:cNvPr id="78" name="TextBox 77"/>
           <p:cNvSpPr txBox="1"/>
           <p:nvPr/>
         </p:nvSpPr>
@@ -33363,7 +33493,7 @@
       </p:sp>
       <p:sp>
         <p:nvSpPr>
-          <p:cNvPr id="76" name="TextBox 75"/>
+          <p:cNvPr id="79" name="TextBox 78"/>
           <p:cNvSpPr txBox="1"/>
           <p:nvPr/>
         </p:nvSpPr>
@@ -33402,7 +33532,7 @@
       </p:sp>
       <p:sp>
         <p:nvSpPr>
-          <p:cNvPr id="77" name="TextBox 76"/>
+          <p:cNvPr id="80" name="TextBox 79"/>
           <p:cNvSpPr txBox="1"/>
           <p:nvPr/>
         </p:nvSpPr>
@@ -33441,7 +33571,7 @@
       </p:sp>
       <p:sp>
         <p:nvSpPr>
-          <p:cNvPr id="78" name="Rectangle 77"/>
+          <p:cNvPr id="81" name="Rectangle 80"/>
           <p:cNvSpPr/>
           <p:nvPr/>
         </p:nvSpPr>
@@ -33472,7 +33602,7 @@
       </p:sp>
       <p:sp>
         <p:nvSpPr>
-          <p:cNvPr id="79" name="TextBox 78"/>
+          <p:cNvPr id="82" name="TextBox 81"/>
           <p:cNvSpPr txBox="1"/>
           <p:nvPr/>
         </p:nvSpPr>
@@ -33511,7 +33641,7 @@
       </p:sp>
       <p:sp>
         <p:nvSpPr>
-          <p:cNvPr id="80" name="TextBox 79"/>
+          <p:cNvPr id="83" name="TextBox 82"/>
           <p:cNvSpPr txBox="1"/>
           <p:nvPr/>
         </p:nvSpPr>
@@ -33550,7 +33680,7 @@
       </p:sp>
       <p:sp>
         <p:nvSpPr>
-          <p:cNvPr id="81" name="TextBox 80"/>
+          <p:cNvPr id="84" name="TextBox 83"/>
           <p:cNvSpPr txBox="1"/>
           <p:nvPr/>
         </p:nvSpPr>
@@ -33589,7 +33719,7 @@
       </p:sp>
       <p:sp>
         <p:nvSpPr>
-          <p:cNvPr id="82" name="Rectangle 81"/>
+          <p:cNvPr id="85" name="Rectangle 84"/>
           <p:cNvSpPr/>
           <p:nvPr/>
         </p:nvSpPr>
@@ -33620,7 +33750,7 @@
       </p:sp>
       <p:sp>
         <p:nvSpPr>
-          <p:cNvPr id="83" name="TextBox 82"/>
+          <p:cNvPr id="86" name="TextBox 85"/>
           <p:cNvSpPr txBox="1"/>
           <p:nvPr/>
         </p:nvSpPr>
@@ -33659,7 +33789,7 @@
       </p:sp>
       <p:sp>
         <p:nvSpPr>
-          <p:cNvPr id="84" name="TextBox 83"/>
+          <p:cNvPr id="87" name="TextBox 86"/>
           <p:cNvSpPr txBox="1"/>
           <p:nvPr/>
         </p:nvSpPr>
@@ -33698,7 +33828,7 @@
       </p:sp>
       <p:sp>
         <p:nvSpPr>
-          <p:cNvPr id="85" name="TextBox 84"/>
+          <p:cNvPr id="88" name="TextBox 87"/>
           <p:cNvSpPr txBox="1"/>
           <p:nvPr/>
         </p:nvSpPr>
@@ -33737,7 +33867,7 @@
       </p:sp>
       <p:sp>
         <p:nvSpPr>
-          <p:cNvPr id="86" name="Rectangle 85"/>
+          <p:cNvPr id="89" name="Rectangle 88"/>
           <p:cNvSpPr/>
           <p:nvPr/>
         </p:nvSpPr>
@@ -33768,7 +33898,7 @@
       </p:sp>
       <p:sp>
         <p:nvSpPr>
-          <p:cNvPr id="87" name="TextBox 86"/>
+          <p:cNvPr id="90" name="TextBox 89"/>
           <p:cNvSpPr txBox="1"/>
           <p:nvPr/>
         </p:nvSpPr>
@@ -33807,7 +33937,7 @@
       </p:sp>
       <p:sp>
         <p:nvSpPr>
-          <p:cNvPr id="88" name="TextBox 87"/>
+          <p:cNvPr id="91" name="TextBox 90"/>
           <p:cNvSpPr txBox="1"/>
           <p:nvPr/>
         </p:nvSpPr>

--- a/outputs/pie-investor-deck.pptx
+++ b/outputs/pie-investor-deck.pptx
@@ -17543,7 +17543,7 @@
                 </a:solidFill>
                 <a:latin typeface="IBM Plex Sans"/>
               </a:rPr>
-              <a:t>Price set from memory or last invoice</a:t>
+              <a:t>Price set from memory; floor unknown at the moment of discount</a:t>
             </a:r>
           </a:p>
         </p:txBody>
@@ -25719,8 +25719,8 @@
         </p:nvSpPr>
         <p:spPr>
           <a:xfrm>
-            <a:off x="914400" y="5138928"/>
-            <a:ext cx="6583680" cy="365760"/>
+            <a:off x="914400" y="5047488"/>
+            <a:ext cx="9692640" cy="475488"/>
           </a:xfrm>
           <a:prstGeom prst="rect">
             <a:avLst/>
@@ -25735,7 +25735,7 @@
           <a:p>
             <a:pPr algn="l">
               <a:lnSpc>
-                <a:spcPct val="115000"/>
+                <a:spcPct val="128000"/>
               </a:lnSpc>
             </a:pPr>
             <a:r>
@@ -25745,7 +25745,7 @@
                 </a:solidFill>
                 <a:latin typeface="IBM Plex Sans"/>
               </a:rPr>
-              <a:t>The human still approves every line. PIE removes the lookup, not the judgement.</a:t>
+              <a:t>The human still approves every line. PIE removes the lookup, not the judgement — and no line leaves below floor.</a:t>
             </a:r>
           </a:p>
         </p:txBody>
@@ -25758,8 +25758,8 @@
         </p:nvSpPr>
         <p:spPr>
           <a:xfrm>
-            <a:off x="914400" y="5577840"/>
-            <a:ext cx="4343400" cy="365760"/>
+            <a:off x="914400" y="5596128"/>
+            <a:ext cx="4343400" cy="347472"/>
           </a:xfrm>
           <a:prstGeom prst="rect">
             <a:avLst/>
@@ -25789,8 +25789,8 @@
         </p:nvSpPr>
         <p:spPr>
           <a:xfrm>
-            <a:off x="996696" y="5632703"/>
-            <a:ext cx="4178808" cy="256032"/>
+            <a:off x="996696" y="5650992"/>
+            <a:ext cx="4178808" cy="237744"/>
           </a:xfrm>
           <a:prstGeom prst="rect">
             <a:avLst/>
@@ -27034,7 +27034,7 @@
         <p:spPr>
           <a:xfrm>
             <a:off x="914400" y="2020824"/>
-            <a:ext cx="5280659" cy="502920"/>
+            <a:ext cx="4404360" cy="502920"/>
           </a:xfrm>
           <a:prstGeom prst="rect">
             <a:avLst/>
@@ -27053,7 +27053,7 @@
               </a:lnSpc>
             </a:pPr>
             <a:r>
-              <a:rPr sz="2700" b="0" spc="0">
+              <a:rPr sz="2200" b="0" spc="0">
                 <a:solidFill>
                   <a:srgbClr val="0E1116"/>
                 </a:solidFill>
@@ -27072,8 +27072,8 @@
         </p:nvCxnSpPr>
         <p:spPr>
           <a:xfrm>
-            <a:off x="914400" y="2551176"/>
-            <a:ext cx="205740" cy="0"/>
+            <a:off x="914400" y="2459736"/>
+            <a:ext cx="167640" cy="0"/>
           </a:xfrm>
           <a:prstGeom prst="line">
             <a:avLst/>
@@ -27094,8 +27094,8 @@
         </p:nvCxnSpPr>
         <p:spPr>
           <a:xfrm>
-            <a:off x="1017270" y="2569464"/>
-            <a:ext cx="0" cy="310896"/>
+            <a:off x="998219" y="2478024"/>
+            <a:ext cx="0" cy="256032"/>
           </a:xfrm>
           <a:prstGeom prst="line">
             <a:avLst/>
@@ -27116,8 +27116,8 @@
         </p:nvCxnSpPr>
         <p:spPr>
           <a:xfrm>
-            <a:off x="1017270" y="2880360"/>
-            <a:ext cx="472846" cy="265176"/>
+            <a:off x="998219" y="2734056"/>
+            <a:ext cx="491897" cy="210312"/>
           </a:xfrm>
           <a:prstGeom prst="line">
             <a:avLst/>
@@ -27138,7 +27138,7 @@
         </p:nvSpPr>
         <p:spPr>
           <a:xfrm>
-            <a:off x="960120" y="3191256"/>
+            <a:off x="960120" y="2990088"/>
             <a:ext cx="1059992" cy="457200"/>
           </a:xfrm>
           <a:prstGeom prst="rect">
@@ -27177,8 +27177,8 @@
         </p:nvCxnSpPr>
         <p:spPr>
           <a:xfrm>
-            <a:off x="1120140" y="2551176"/>
-            <a:ext cx="205740" cy="0"/>
+            <a:off x="1082040" y="2459736"/>
+            <a:ext cx="167640" cy="0"/>
           </a:xfrm>
           <a:prstGeom prst="line">
             <a:avLst/>
@@ -27199,8 +27199,8 @@
         </p:nvCxnSpPr>
         <p:spPr>
           <a:xfrm>
-            <a:off x="1223010" y="2569464"/>
-            <a:ext cx="0" cy="310896"/>
+            <a:off x="1165860" y="2478024"/>
+            <a:ext cx="0" cy="256032"/>
           </a:xfrm>
           <a:prstGeom prst="line">
             <a:avLst/>
@@ -27221,8 +27221,8 @@
         </p:nvCxnSpPr>
         <p:spPr>
           <a:xfrm>
-            <a:off x="1223010" y="2880360"/>
-            <a:ext cx="1418539" cy="265176"/>
+            <a:off x="1165860" y="2734056"/>
+            <a:ext cx="1475689" cy="210312"/>
           </a:xfrm>
           <a:prstGeom prst="line">
             <a:avLst/>
@@ -27243,7 +27243,7 @@
         </p:nvSpPr>
         <p:spPr>
           <a:xfrm>
-            <a:off x="2111552" y="3191256"/>
+            <a:off x="2111552" y="2990088"/>
             <a:ext cx="1059992" cy="457200"/>
           </a:xfrm>
           <a:prstGeom prst="rect">
@@ -27298,8 +27298,8 @@
         </p:nvCxnSpPr>
         <p:spPr>
           <a:xfrm>
-            <a:off x="1325880" y="2551176"/>
-            <a:ext cx="205739" cy="0"/>
+            <a:off x="1249680" y="2459736"/>
+            <a:ext cx="167639" cy="0"/>
           </a:xfrm>
           <a:prstGeom prst="line">
             <a:avLst/>
@@ -27320,8 +27320,8 @@
         </p:nvCxnSpPr>
         <p:spPr>
           <a:xfrm>
-            <a:off x="1428750" y="2569464"/>
-            <a:ext cx="0" cy="310896"/>
+            <a:off x="1333500" y="2478024"/>
+            <a:ext cx="0" cy="256032"/>
           </a:xfrm>
           <a:prstGeom prst="line">
             <a:avLst/>
@@ -27342,8 +27342,8 @@
         </p:nvCxnSpPr>
         <p:spPr>
           <a:xfrm>
-            <a:off x="1428750" y="2880360"/>
-            <a:ext cx="2364232" cy="265176"/>
+            <a:off x="1333500" y="2734056"/>
+            <a:ext cx="2459482" cy="210312"/>
           </a:xfrm>
           <a:prstGeom prst="line">
             <a:avLst/>
@@ -27364,7 +27364,7 @@
         </p:nvSpPr>
         <p:spPr>
           <a:xfrm>
-            <a:off x="3262985" y="3191256"/>
+            <a:off x="3262985" y="2990088"/>
             <a:ext cx="1059992" cy="457200"/>
           </a:xfrm>
           <a:prstGeom prst="rect">
@@ -27419,8 +27419,8 @@
         </p:nvCxnSpPr>
         <p:spPr>
           <a:xfrm>
-            <a:off x="1531619" y="2551176"/>
-            <a:ext cx="205741" cy="0"/>
+            <a:off x="1417319" y="2459736"/>
+            <a:ext cx="167641" cy="0"/>
           </a:xfrm>
           <a:prstGeom prst="line">
             <a:avLst/>
@@ -27441,8 +27441,8 @@
         </p:nvCxnSpPr>
         <p:spPr>
           <a:xfrm>
-            <a:off x="1634489" y="2569464"/>
-            <a:ext cx="0" cy="310896"/>
+            <a:off x="1501140" y="2478024"/>
+            <a:ext cx="0" cy="256032"/>
           </a:xfrm>
           <a:prstGeom prst="line">
             <a:avLst/>
@@ -27463,8 +27463,8 @@
         </p:nvCxnSpPr>
         <p:spPr>
           <a:xfrm>
-            <a:off x="1634489" y="2880360"/>
-            <a:ext cx="3309925" cy="265176"/>
+            <a:off x="1501140" y="2734056"/>
+            <a:ext cx="3443274" cy="210312"/>
           </a:xfrm>
           <a:prstGeom prst="line">
             <a:avLst/>
@@ -27485,7 +27485,7 @@
         </p:nvSpPr>
         <p:spPr>
           <a:xfrm>
-            <a:off x="4414418" y="3191256"/>
+            <a:off x="4414418" y="2990088"/>
             <a:ext cx="1059992" cy="457200"/>
           </a:xfrm>
           <a:prstGeom prst="rect">
@@ -27524,8 +27524,8 @@
         </p:nvCxnSpPr>
         <p:spPr>
           <a:xfrm>
-            <a:off x="1943100" y="2551176"/>
-            <a:ext cx="411479" cy="0"/>
+            <a:off x="1752599" y="2459736"/>
+            <a:ext cx="335281" cy="0"/>
           </a:xfrm>
           <a:prstGeom prst="line">
             <a:avLst/>
@@ -27546,8 +27546,8 @@
         </p:nvCxnSpPr>
         <p:spPr>
           <a:xfrm>
-            <a:off x="2148839" y="2569464"/>
-            <a:ext cx="0" cy="310896"/>
+            <a:off x="1920239" y="2478024"/>
+            <a:ext cx="0" cy="256032"/>
           </a:xfrm>
           <a:prstGeom prst="line">
             <a:avLst/>
@@ -27568,8 +27568,8 @@
         </p:nvCxnSpPr>
         <p:spPr>
           <a:xfrm>
-            <a:off x="2148839" y="2880360"/>
-            <a:ext cx="3947008" cy="265176"/>
+            <a:off x="1920239" y="2734056"/>
+            <a:ext cx="4175608" cy="210312"/>
           </a:xfrm>
           <a:prstGeom prst="line">
             <a:avLst/>
@@ -27590,7 +27590,7 @@
         </p:nvSpPr>
         <p:spPr>
           <a:xfrm>
-            <a:off x="5565851" y="3191256"/>
+            <a:off x="5565851" y="2990088"/>
             <a:ext cx="1059992" cy="457200"/>
           </a:xfrm>
           <a:prstGeom prst="rect">
@@ -27645,8 +27645,8 @@
         </p:nvCxnSpPr>
         <p:spPr>
           <a:xfrm>
-            <a:off x="2354579" y="2551176"/>
-            <a:ext cx="411481" cy="0"/>
+            <a:off x="2087880" y="2459736"/>
+            <a:ext cx="335280" cy="0"/>
           </a:xfrm>
           <a:prstGeom prst="line">
             <a:avLst/>
@@ -27667,8 +27667,8 @@
         </p:nvCxnSpPr>
         <p:spPr>
           <a:xfrm>
-            <a:off x="2560320" y="2569464"/>
-            <a:ext cx="0" cy="310896"/>
+            <a:off x="2255520" y="2478024"/>
+            <a:ext cx="0" cy="256032"/>
           </a:xfrm>
           <a:prstGeom prst="line">
             <a:avLst/>
@@ -27689,8 +27689,8 @@
         </p:nvCxnSpPr>
         <p:spPr>
           <a:xfrm>
-            <a:off x="2560320" y="2880360"/>
-            <a:ext cx="4686960" cy="265176"/>
+            <a:off x="2255520" y="2734056"/>
+            <a:ext cx="4991760" cy="210312"/>
           </a:xfrm>
           <a:prstGeom prst="line">
             <a:avLst/>
@@ -27711,7 +27711,7 @@
         </p:nvSpPr>
         <p:spPr>
           <a:xfrm>
-            <a:off x="6717284" y="3191256"/>
+            <a:off x="6717284" y="2990088"/>
             <a:ext cx="1059992" cy="457200"/>
           </a:xfrm>
           <a:prstGeom prst="rect">
@@ -27766,8 +27766,8 @@
         </p:nvCxnSpPr>
         <p:spPr>
           <a:xfrm>
-            <a:off x="2766060" y="2551176"/>
-            <a:ext cx="411479" cy="0"/>
+            <a:off x="2423160" y="2459736"/>
+            <a:ext cx="335280" cy="0"/>
           </a:xfrm>
           <a:prstGeom prst="line">
             <a:avLst/>
@@ -27788,8 +27788,8 @@
         </p:nvCxnSpPr>
         <p:spPr>
           <a:xfrm>
-            <a:off x="2971800" y="2569464"/>
-            <a:ext cx="0" cy="310896"/>
+            <a:off x="2590799" y="2478024"/>
+            <a:ext cx="0" cy="256032"/>
           </a:xfrm>
           <a:prstGeom prst="line">
             <a:avLst/>
@@ -27810,8 +27810,8 @@
         </p:nvCxnSpPr>
         <p:spPr>
           <a:xfrm>
-            <a:off x="2971800" y="2880360"/>
-            <a:ext cx="5426913" cy="265176"/>
+            <a:off x="2590799" y="2734056"/>
+            <a:ext cx="5807914" cy="210312"/>
           </a:xfrm>
           <a:prstGeom prst="line">
             <a:avLst/>
@@ -27832,7 +27832,7 @@
         </p:nvSpPr>
         <p:spPr>
           <a:xfrm>
-            <a:off x="7868716" y="3191256"/>
+            <a:off x="7868716" y="2990088"/>
             <a:ext cx="1059992" cy="457200"/>
           </a:xfrm>
           <a:prstGeom prst="rect">
@@ -27887,8 +27887,8 @@
         </p:nvCxnSpPr>
         <p:spPr>
           <a:xfrm>
-            <a:off x="3383279" y="2551176"/>
-            <a:ext cx="411480" cy="0"/>
+            <a:off x="2926079" y="2459736"/>
+            <a:ext cx="335281" cy="0"/>
           </a:xfrm>
           <a:prstGeom prst="line">
             <a:avLst/>
@@ -27909,8 +27909,8 @@
         </p:nvCxnSpPr>
         <p:spPr>
           <a:xfrm>
-            <a:off x="3589020" y="2569464"/>
-            <a:ext cx="0" cy="310896"/>
+            <a:off x="3093720" y="2478024"/>
+            <a:ext cx="0" cy="256032"/>
           </a:xfrm>
           <a:prstGeom prst="line">
             <a:avLst/>
@@ -27931,8 +27931,8 @@
         </p:nvCxnSpPr>
         <p:spPr>
           <a:xfrm>
-            <a:off x="3589020" y="2880360"/>
-            <a:ext cx="5961126" cy="265176"/>
+            <a:off x="3093720" y="2734056"/>
+            <a:ext cx="6456426" cy="210312"/>
           </a:xfrm>
           <a:prstGeom prst="line">
             <a:avLst/>
@@ -27953,7 +27953,7 @@
         </p:nvSpPr>
         <p:spPr>
           <a:xfrm>
-            <a:off x="9020149" y="3191256"/>
+            <a:off x="9020149" y="2990088"/>
             <a:ext cx="1059992" cy="457200"/>
           </a:xfrm>
           <a:prstGeom prst="rect">
@@ -27992,8 +27992,8 @@
         </p:nvCxnSpPr>
         <p:spPr>
           <a:xfrm>
-            <a:off x="5029200" y="2569464"/>
-            <a:ext cx="0" cy="310896"/>
+            <a:off x="4267199" y="2478024"/>
+            <a:ext cx="0" cy="256032"/>
           </a:xfrm>
           <a:prstGeom prst="line">
             <a:avLst/>
@@ -28014,8 +28014,8 @@
         </p:nvCxnSpPr>
         <p:spPr>
           <a:xfrm>
-            <a:off x="5029200" y="2880360"/>
-            <a:ext cx="5672378" cy="265176"/>
+            <a:off x="4267199" y="2734056"/>
+            <a:ext cx="6434379" cy="210312"/>
           </a:xfrm>
           <a:prstGeom prst="line">
             <a:avLst/>
@@ -28036,7 +28036,7 @@
         </p:nvSpPr>
         <p:spPr>
           <a:xfrm>
-            <a:off x="10171582" y="3191256"/>
+            <a:off x="10171582" y="2990088"/>
             <a:ext cx="1059992" cy="457200"/>
           </a:xfrm>
           <a:prstGeom prst="rect">
@@ -28083,15 +28083,54 @@
           </a:p>
         </p:txBody>
       </p:sp>
-      <p:cxnSp>
-        <p:nvCxnSpPr>
-          <p:cNvPr id="87" name="Connector 86"/>
-          <p:cNvCxnSpPr/>
-          <p:nvPr/>
-        </p:nvCxnSpPr>
-        <p:spPr>
-          <a:xfrm>
-            <a:off x="914400" y="4224528"/>
+      <p:sp>
+        <p:nvSpPr>
+          <p:cNvPr id="87" name="TextBox 86"/>
+          <p:cNvSpPr txBox="1"/>
+          <p:nvPr/>
+        </p:nvSpPr>
+        <p:spPr>
+          <a:xfrm>
+            <a:off x="914400" y="3712463"/>
+            <a:ext cx="5486400" cy="219456"/>
+          </a:xfrm>
+          <a:prstGeom prst="rect">
+            <a:avLst/>
+          </a:prstGeom>
+          <a:noFill/>
+        </p:spPr>
+        <p:txBody>
+          <a:bodyPr wrap="square" anchor="t" lIns="0" rIns="0" tIns="0" bIns="0">
+            <a:spAutoFit/>
+          </a:bodyPr>
+          <a:lstStyle/>
+          <a:p>
+            <a:pPr algn="l">
+              <a:lnSpc>
+                <a:spcPct val="100000"/>
+              </a:lnSpc>
+            </a:pPr>
+            <a:r>
+              <a:rPr sz="850" b="0" spc="90">
+                <a:solidFill>
+                  <a:srgbClr val="A8A69E"/>
+                </a:solidFill>
+                <a:latin typeface="IBM Plex Mono"/>
+              </a:rPr>
+              <a:t>WHAT THE DESK GETS</a:t>
+            </a:r>
+          </a:p>
+        </p:txBody>
+      </p:sp>
+      <p:cxnSp>
+        <p:nvCxnSpPr>
+          <p:cNvPr id="88" name="Connector 87"/>
+          <p:cNvCxnSpPr/>
+          <p:nvPr/>
+        </p:nvCxnSpPr>
+        <p:spPr>
+          <a:xfrm>
+            <a:off x="914400" y="3931920"/>
             <a:ext cx="10362895" cy="0"/>
           </a:xfrm>
           <a:prstGeom prst="line">
@@ -28107,14 +28146,14 @@
       </p:cxnSp>
       <p:sp>
         <p:nvSpPr>
-          <p:cNvPr id="88" name="Rectangle 87"/>
+          <p:cNvPr id="89" name="Rectangle 88"/>
           <p:cNvSpPr/>
           <p:nvPr/>
         </p:nvSpPr>
         <p:spPr>
           <a:xfrm>
-            <a:off x="914400" y="4462272"/>
-            <a:ext cx="1965960" cy="658368"/>
+            <a:off x="914400" y="4133087"/>
+            <a:ext cx="2304288" cy="859536"/>
           </a:xfrm>
           <a:prstGeom prst="rect">
             <a:avLst/>
@@ -28137,14 +28176,14 @@
       </p:sp>
       <p:sp>
         <p:nvSpPr>
-          <p:cNvPr id="89" name="TextBox 88"/>
+          <p:cNvPr id="90" name="TextBox 89"/>
           <p:cNvSpPr txBox="1"/>
           <p:nvPr/>
         </p:nvSpPr>
         <p:spPr>
           <a:xfrm>
-            <a:off x="978408" y="4507992"/>
-            <a:ext cx="1837943" cy="566928"/>
+            <a:off x="978408" y="4178807"/>
+            <a:ext cx="2176272" cy="768096"/>
           </a:xfrm>
           <a:prstGeom prst="rect">
             <a:avLst/>
@@ -28163,7 +28202,7 @@
               </a:lnSpc>
             </a:pPr>
             <a:r>
-              <a:rPr sz="850" b="0">
+              <a:rPr sz="1000" b="0">
                 <a:solidFill>
                   <a:srgbClr val="313337"/>
                 </a:solidFill>
@@ -28179,7 +28218,7 @@
               </a:lnSpc>
             </a:pPr>
             <a:r>
-              <a:rPr sz="850" b="0">
+              <a:rPr sz="1000" b="0">
                 <a:solidFill>
                   <a:srgbClr val="313337"/>
                 </a:solidFill>
@@ -28192,13 +28231,13 @@
       </p:sp>
       <p:cxnSp>
         <p:nvCxnSpPr>
-          <p:cNvPr id="90" name="Connector 89"/>
-          <p:cNvCxnSpPr/>
-          <p:nvPr/>
-        </p:nvCxnSpPr>
-        <p:spPr>
-          <a:xfrm>
-            <a:off x="2880360" y="4791456"/>
+          <p:cNvPr id="91" name="Connector 90"/>
+          <p:cNvCxnSpPr/>
+          <p:nvPr/>
+        </p:nvCxnSpPr>
+        <p:spPr>
+          <a:xfrm>
+            <a:off x="3218688" y="4562855"/>
             <a:ext cx="384048" cy="0"/>
           </a:xfrm>
           <a:prstGeom prst="line">
@@ -28215,14 +28254,14 @@
       </p:cxnSp>
       <p:sp>
         <p:nvSpPr>
-          <p:cNvPr id="91" name="Rectangle 90"/>
+          <p:cNvPr id="92" name="Rectangle 91"/>
           <p:cNvSpPr/>
           <p:nvPr/>
         </p:nvSpPr>
         <p:spPr>
           <a:xfrm>
-            <a:off x="3264408" y="4462272"/>
-            <a:ext cx="1965960" cy="658368"/>
+            <a:off x="3602736" y="4133087"/>
+            <a:ext cx="2304288" cy="859536"/>
           </a:xfrm>
           <a:prstGeom prst="rect">
             <a:avLst/>
@@ -28245,14 +28284,14 @@
       </p:sp>
       <p:sp>
         <p:nvSpPr>
-          <p:cNvPr id="92" name="TextBox 91"/>
+          <p:cNvPr id="93" name="TextBox 92"/>
           <p:cNvSpPr txBox="1"/>
           <p:nvPr/>
         </p:nvSpPr>
         <p:spPr>
           <a:xfrm>
-            <a:off x="3328415" y="4507992"/>
-            <a:ext cx="1837943" cy="566928"/>
+            <a:off x="3666744" y="4178807"/>
+            <a:ext cx="2176272" cy="768096"/>
           </a:xfrm>
           <a:prstGeom prst="rect">
             <a:avLst/>
@@ -28271,13 +28310,13 @@
               </a:lnSpc>
             </a:pPr>
             <a:r>
-              <a:rPr sz="850" b="0">
+              <a:rPr sz="1000" b="0">
                 <a:solidFill>
                   <a:srgbClr val="313337"/>
                 </a:solidFill>
                 <a:latin typeface="IBM Plex Mono"/>
               </a:rPr>
-              <a:t>Zoho</a:t>
+              <a:t>Availability</a:t>
             </a:r>
           </a:p>
           <a:p>
@@ -28287,7 +28326,7 @@
               </a:lnSpc>
             </a:pPr>
             <a:r>
-              <a:rPr sz="850" b="0">
+              <a:rPr sz="1000" b="0">
                 <a:solidFill>
                   <a:srgbClr val="313337"/>
                 </a:solidFill>
@@ -28300,13 +28339,13 @@
       </p:sp>
       <p:cxnSp>
         <p:nvCxnSpPr>
-          <p:cNvPr id="93" name="Connector 92"/>
-          <p:cNvCxnSpPr/>
-          <p:nvPr/>
-        </p:nvCxnSpPr>
-        <p:spPr>
-          <a:xfrm>
-            <a:off x="5230368" y="4791456"/>
+          <p:cNvPr id="94" name="Connector 93"/>
+          <p:cNvCxnSpPr/>
+          <p:nvPr/>
+        </p:nvCxnSpPr>
+        <p:spPr>
+          <a:xfrm>
+            <a:off x="5907024" y="4562855"/>
             <a:ext cx="384048" cy="0"/>
           </a:xfrm>
           <a:prstGeom prst="line">
@@ -28323,14 +28362,14 @@
       </p:cxnSp>
       <p:sp>
         <p:nvSpPr>
-          <p:cNvPr id="94" name="Rectangle 93"/>
+          <p:cNvPr id="95" name="Rectangle 94"/>
           <p:cNvSpPr/>
           <p:nvPr/>
         </p:nvSpPr>
         <p:spPr>
           <a:xfrm>
-            <a:off x="5614416" y="4462272"/>
-            <a:ext cx="1965960" cy="658368"/>
+            <a:off x="6291072" y="4133087"/>
+            <a:ext cx="2304288" cy="859536"/>
           </a:xfrm>
           <a:prstGeom prst="rect">
             <a:avLst/>
@@ -28353,14 +28392,14 @@
       </p:sp>
       <p:sp>
         <p:nvSpPr>
-          <p:cNvPr id="95" name="TextBox 94"/>
+          <p:cNvPr id="96" name="TextBox 95"/>
           <p:cNvSpPr txBox="1"/>
           <p:nvPr/>
         </p:nvSpPr>
         <p:spPr>
           <a:xfrm>
-            <a:off x="5678424" y="4507992"/>
-            <a:ext cx="1837943" cy="566928"/>
+            <a:off x="6355080" y="4178807"/>
+            <a:ext cx="2176272" cy="768096"/>
           </a:xfrm>
           <a:prstGeom prst="rect">
             <a:avLst/>
@@ -28379,13 +28418,13 @@
               </a:lnSpc>
             </a:pPr>
             <a:r>
-              <a:rPr sz="850" b="0">
+              <a:rPr sz="1000" b="0">
                 <a:solidFill>
                   <a:srgbClr val="313337"/>
                 </a:solidFill>
                 <a:latin typeface="IBM Plex Mono"/>
               </a:rPr>
-              <a:t>Pricing</a:t>
+              <a:t>Recommended</a:t>
             </a:r>
           </a:p>
           <a:p>
@@ -28395,26 +28434,26 @@
               </a:lnSpc>
             </a:pPr>
             <a:r>
-              <a:rPr sz="850" b="0">
+              <a:rPr sz="1000" b="0">
                 <a:solidFill>
                   <a:srgbClr val="313337"/>
                 </a:solidFill>
                 <a:latin typeface="IBM Plex Mono"/>
               </a:rPr>
-              <a:t>recommended · floor</a:t>
-            </a:r>
-          </a:p>
-        </p:txBody>
-      </p:sp>
-      <p:cxnSp>
-        <p:nvCxnSpPr>
-          <p:cNvPr id="96" name="Connector 95"/>
-          <p:cNvCxnSpPr/>
-          <p:nvPr/>
-        </p:nvCxnSpPr>
-        <p:spPr>
-          <a:xfrm>
-            <a:off x="7580375" y="4791456"/>
+              <a:t>price · floor</a:t>
+            </a:r>
+          </a:p>
+        </p:txBody>
+      </p:sp>
+      <p:cxnSp>
+        <p:nvCxnSpPr>
+          <p:cNvPr id="97" name="Connector 96"/>
+          <p:cNvCxnSpPr/>
+          <p:nvPr/>
+        </p:nvCxnSpPr>
+        <p:spPr>
+          <a:xfrm>
+            <a:off x="8595360" y="4562855"/>
             <a:ext cx="384048" cy="0"/>
           </a:xfrm>
           <a:prstGeom prst="line">
@@ -28431,20 +28470,20 @@
       </p:cxnSp>
       <p:sp>
         <p:nvSpPr>
-          <p:cNvPr id="97" name="Rectangle 96"/>
+          <p:cNvPr id="98" name="Rectangle 97"/>
           <p:cNvSpPr/>
           <p:nvPr/>
         </p:nvSpPr>
         <p:spPr>
           <a:xfrm>
-            <a:off x="7964423" y="4462272"/>
-            <a:ext cx="1965960" cy="658368"/>
-          </a:xfrm>
-          <a:prstGeom prst="rect">
-            <a:avLst/>
-          </a:prstGeom>
-          <a:noFill/>
-          <a:ln w="9525">
+            <a:off x="8979408" y="4133087"/>
+            <a:ext cx="2304288" cy="859536"/>
+          </a:xfrm>
+          <a:prstGeom prst="rect">
+            <a:avLst/>
+          </a:prstGeom>
+          <a:noFill/>
+          <a:ln w="19050">
             <a:solidFill>
               <a:srgbClr val="1B4D7A"/>
             </a:solidFill>
@@ -28461,14 +28500,14 @@
       </p:sp>
       <p:sp>
         <p:nvSpPr>
-          <p:cNvPr id="98" name="TextBox 97"/>
+          <p:cNvPr id="99" name="TextBox 98"/>
           <p:cNvSpPr txBox="1"/>
           <p:nvPr/>
         </p:nvSpPr>
         <p:spPr>
           <a:xfrm>
-            <a:off x="8028431" y="4507992"/>
-            <a:ext cx="1837943" cy="566928"/>
+            <a:off x="9043416" y="4178807"/>
+            <a:ext cx="2176272" cy="768096"/>
           </a:xfrm>
           <a:prstGeom prst="rect">
             <a:avLst/>
@@ -28487,27 +28526,43 @@
               </a:lnSpc>
             </a:pPr>
             <a:r>
-              <a:rPr sz="850" b="1">
+              <a:rPr sz="1000" b="1">
                 <a:solidFill>
                   <a:srgbClr val="1B4D7A"/>
                 </a:solidFill>
                 <a:latin typeface="IBM Plex Mono"/>
               </a:rPr>
-              <a:t>EXACT</a:t>
-            </a:r>
-          </a:p>
-        </p:txBody>
-      </p:sp>
-      <p:sp>
-        <p:nvSpPr>
-          <p:cNvPr id="99" name="TextBox 98"/>
+              <a:t>Margin</a:t>
+            </a:r>
+          </a:p>
+          <a:p>
+            <a:pPr algn="ctr">
+              <a:lnSpc>
+                <a:spcPct val="112000"/>
+              </a:lnSpc>
+            </a:pPr>
+            <a:r>
+              <a:rPr sz="1000" b="1">
+                <a:solidFill>
+                  <a:srgbClr val="1B4D7A"/>
+                </a:solidFill>
+                <a:latin typeface="IBM Plex Mono"/>
+              </a:rPr>
+              <a:t>position</a:t>
+            </a:r>
+          </a:p>
+        </p:txBody>
+      </p:sp>
+      <p:sp>
+        <p:nvSpPr>
+          <p:cNvPr id="100" name="TextBox 99"/>
           <p:cNvSpPr txBox="1"/>
           <p:nvPr/>
         </p:nvSpPr>
         <p:spPr>
           <a:xfrm>
-            <a:off x="914400" y="5504688"/>
-            <a:ext cx="8595360" cy="329184"/>
+            <a:off x="914400" y="5230368"/>
+            <a:ext cx="9692640" cy="329184"/>
           </a:xfrm>
           <a:prstGeom prst="rect">
             <a:avLst/>
@@ -28532,7 +28587,7 @@
                 </a:solidFill>
                 <a:latin typeface="IBM Plex Sans"/>
               </a:rPr>
-              <a:t>The eight character spans are the engine's own output.</a:t>
+              <a:t>The eight spans are the engine's own output.</a:t>
             </a:r>
           </a:p>
         </p:txBody>
@@ -33119,7 +33174,7 @@
         <p:spPr>
           <a:xfrm>
             <a:off x="914400" y="1965960"/>
-            <a:ext cx="2926080" cy="219456"/>
+            <a:ext cx="4572000" cy="219456"/>
           </a:xfrm>
           <a:prstGeom prst="rect">
             <a:avLst/>
@@ -33144,7 +33199,7 @@
                 </a:solidFill>
                 <a:latin typeface="IBM Plex Mono"/>
               </a:rPr>
-              <a:t>CATEGORY LADDER</a:t>
+              <a:t>WHERE THE SAME CONVERGENCE APPEARS</a:t>
             </a:r>
           </a:p>
         </p:txBody>
@@ -33183,7 +33238,7 @@
                 </a:solidFill>
                 <a:latin typeface="IBM Plex Sans"/>
               </a:rPr>
-              <a:t>The same convergence recurs: many technical SKUs, constant quoting, margin pressure.</a:t>
+              <a:t>New manufacturer, unchanged engine.</a:t>
             </a:r>
           </a:p>
           <a:p>
@@ -33215,7 +33270,7 @@
                 </a:solidFill>
                 <a:latin typeface="IBM Plex Sans"/>
               </a:rPr>
-              <a:t>New manufacturer, unchanged engine. New category also needs a standards decoder.</a:t>
+              <a:t>New category also needs a standards decoder.</a:t>
             </a:r>
           </a:p>
         </p:txBody>
@@ -33297,8 +33352,8 @@
         </p:nvSpPr>
         <p:spPr>
           <a:xfrm>
-            <a:off x="7525512" y="2313432"/>
-            <a:ext cx="3587191" cy="822960"/>
+            <a:off x="7525512" y="2295144"/>
+            <a:ext cx="3587191" cy="868680"/>
           </a:xfrm>
           <a:prstGeom prst="rect">
             <a:avLst/>
@@ -33317,13 +33372,13 @@
               </a:lnSpc>
             </a:pPr>
             <a:r>
-              <a:rPr sz="1100" b="0">
+              <a:rPr sz="1000" b="0">
                 <a:solidFill>
                   <a:srgbClr val="1B4D7A"/>
                 </a:solidFill>
                 <a:latin typeface="IBM Plex Mono"/>
               </a:rPr>
-              <a:t>TAM  =  A × B</a:t>
+              <a:t>TAM  =  A × B      =  $720M</a:t>
             </a:r>
           </a:p>
           <a:p>
@@ -33333,13 +33388,13 @@
               </a:lnSpc>
             </a:pPr>
             <a:r>
-              <a:rPr sz="1100" b="0">
+              <a:rPr sz="1000" b="0">
                 <a:solidFill>
                   <a:srgbClr val="1B4D7A"/>
                 </a:solidFill>
                 <a:latin typeface="IBM Plex Mono"/>
               </a:rPr>
-              <a:t>SAM  =  TAM × C</a:t>
+              <a:t>SAM  =  TAM × C    =  $324M</a:t>
             </a:r>
           </a:p>
           <a:p>
@@ -33349,13 +33404,13 @@
               </a:lnSpc>
             </a:pPr>
             <a:r>
-              <a:rPr sz="1100" b="0">
+              <a:rPr sz="1000" b="0">
                 <a:solidFill>
                   <a:srgbClr val="1B4D7A"/>
                 </a:solidFill>
                 <a:latin typeface="IBM Plex Mono"/>
               </a:rPr>
-              <a:t>SOM  =  SAM × D</a:t>
+              <a:t>SOM  =  SAM × D    =  $9.7M</a:t>
             </a:r>
           </a:p>
         </p:txBody>
@@ -33368,7 +33423,7 @@
         </p:nvCxnSpPr>
         <p:spPr>
           <a:xfrm>
-            <a:off x="7525512" y="3264408"/>
+            <a:off x="7525512" y="3246120"/>
             <a:ext cx="3587191" cy="0"/>
           </a:xfrm>
           <a:prstGeom prst="line">
@@ -33390,7 +33445,46 @@
         </p:nvSpPr>
         <p:spPr>
           <a:xfrm>
-            <a:off x="7525512" y="3429000"/>
+            <a:off x="7525512" y="3337560"/>
+            <a:ext cx="3587191" cy="219456"/>
+          </a:xfrm>
+          <a:prstGeom prst="rect">
+            <a:avLst/>
+          </a:prstGeom>
+          <a:noFill/>
+        </p:spPr>
+        <p:txBody>
+          <a:bodyPr wrap="square" anchor="t" lIns="0" rIns="0" tIns="0" bIns="0">
+            <a:spAutoFit/>
+          </a:bodyPr>
+          <a:lstStyle/>
+          <a:p>
+            <a:pPr algn="l">
+              <a:lnSpc>
+                <a:spcPct val="100000"/>
+              </a:lnSpc>
+            </a:pPr>
+            <a:r>
+              <a:rPr sz="750" b="0" spc="90">
+                <a:solidFill>
+                  <a:srgbClr val="C8892A"/>
+                </a:solidFill>
+                <a:latin typeface="IBM Plex Mono"/>
+              </a:rPr>
+              <a:t>ALL INPUTS [ASSUMPTION]</a:t>
+            </a:r>
+          </a:p>
+        </p:txBody>
+      </p:sp>
+      <p:sp>
+        <p:nvSpPr>
+          <p:cNvPr id="77" name="TextBox 76"/>
+          <p:cNvSpPr txBox="1"/>
+          <p:nvPr/>
+        </p:nvSpPr>
+        <p:spPr>
+          <a:xfrm>
+            <a:off x="7525512" y="3630168"/>
             <a:ext cx="274320" cy="274320"/>
           </a:xfrm>
           <a:prstGeom prst="rect">
@@ -33423,14 +33517,14 @@
       </p:sp>
       <p:sp>
         <p:nvSpPr>
-          <p:cNvPr id="77" name="Rectangle 76"/>
+          <p:cNvPr id="78" name="Rectangle 77"/>
           <p:cNvSpPr/>
           <p:nvPr/>
         </p:nvSpPr>
         <p:spPr>
           <a:xfrm>
-            <a:off x="7836408" y="3392424"/>
-            <a:ext cx="1353312" cy="310896"/>
+            <a:off x="7836408" y="3593591"/>
+            <a:ext cx="932688" cy="292608"/>
           </a:xfrm>
           <a:prstGeom prst="rect">
             <a:avLst/>
@@ -33454,14 +33548,14 @@
       </p:sp>
       <p:sp>
         <p:nvSpPr>
-          <p:cNvPr id="78" name="TextBox 77"/>
+          <p:cNvPr id="79" name="TextBox 78"/>
           <p:cNvSpPr txBox="1"/>
           <p:nvPr/>
         </p:nvSpPr>
         <p:spPr>
           <a:xfrm>
-            <a:off x="7918704" y="3447288"/>
-            <a:ext cx="1188720" cy="201168"/>
+            <a:off x="7918704" y="3648456"/>
+            <a:ext cx="768096" cy="182880"/>
           </a:xfrm>
           <a:prstGeom prst="rect">
             <a:avLst/>
@@ -33486,21 +33580,21 @@
                 </a:solidFill>
                 <a:latin typeface="IBM Plex Mono"/>
               </a:rPr>
-              <a:t>[ASSUMPTION]</a:t>
-            </a:r>
-          </a:p>
-        </p:txBody>
-      </p:sp>
-      <p:sp>
-        <p:nvSpPr>
-          <p:cNvPr id="79" name="TextBox 78"/>
+              <a:t>40,000</a:t>
+            </a:r>
+          </a:p>
+        </p:txBody>
+      </p:sp>
+      <p:sp>
+        <p:nvSpPr>
+          <p:cNvPr id="80" name="TextBox 79"/>
           <p:cNvSpPr txBox="1"/>
           <p:nvPr/>
         </p:nvSpPr>
         <p:spPr>
           <a:xfrm>
-            <a:off x="9281160" y="3433572"/>
-            <a:ext cx="1831543" cy="274320"/>
+            <a:off x="8878824" y="3630168"/>
+            <a:ext cx="2233879" cy="274320"/>
           </a:xfrm>
           <a:prstGeom prst="rect">
             <a:avLst/>
@@ -33525,20 +33619,20 @@
                 </a:solidFill>
                 <a:latin typeface="IBM Plex Mono"/>
               </a:rPr>
-              <a:t>distributors</a:t>
-            </a:r>
-          </a:p>
-        </p:txBody>
-      </p:sp>
-      <p:sp>
-        <p:nvSpPr>
-          <p:cNvPr id="80" name="TextBox 79"/>
+              <a:t>distributors in scope</a:t>
+            </a:r>
+          </a:p>
+        </p:txBody>
+      </p:sp>
+      <p:sp>
+        <p:nvSpPr>
+          <p:cNvPr id="81" name="TextBox 80"/>
           <p:cNvSpPr txBox="1"/>
           <p:nvPr/>
         </p:nvSpPr>
         <p:spPr>
           <a:xfrm>
-            <a:off x="7525512" y="3858768"/>
+            <a:off x="7525512" y="4032504"/>
             <a:ext cx="274320" cy="274320"/>
           </a:xfrm>
           <a:prstGeom prst="rect">
@@ -33571,14 +33665,14 @@
       </p:sp>
       <p:sp>
         <p:nvSpPr>
-          <p:cNvPr id="81" name="Rectangle 80"/>
+          <p:cNvPr id="82" name="Rectangle 81"/>
           <p:cNvSpPr/>
           <p:nvPr/>
         </p:nvSpPr>
         <p:spPr>
           <a:xfrm>
-            <a:off x="7836408" y="3822191"/>
-            <a:ext cx="1353312" cy="310896"/>
+            <a:off x="7836408" y="3995928"/>
+            <a:ext cx="932688" cy="292608"/>
           </a:xfrm>
           <a:prstGeom prst="rect">
             <a:avLst/>
@@ -33602,14 +33696,14 @@
       </p:sp>
       <p:sp>
         <p:nvSpPr>
-          <p:cNvPr id="82" name="TextBox 81"/>
+          <p:cNvPr id="83" name="TextBox 82"/>
           <p:cNvSpPr txBox="1"/>
           <p:nvPr/>
         </p:nvSpPr>
         <p:spPr>
           <a:xfrm>
-            <a:off x="7918704" y="3877055"/>
-            <a:ext cx="1188720" cy="201168"/>
+            <a:off x="7918704" y="4050791"/>
+            <a:ext cx="768096" cy="182880"/>
           </a:xfrm>
           <a:prstGeom prst="rect">
             <a:avLst/>
@@ -33634,21 +33728,21 @@
                 </a:solidFill>
                 <a:latin typeface="IBM Plex Mono"/>
               </a:rPr>
-              <a:t>[ASSUMPTION]</a:t>
-            </a:r>
-          </a:p>
-        </p:txBody>
-      </p:sp>
-      <p:sp>
-        <p:nvSpPr>
-          <p:cNvPr id="83" name="TextBox 82"/>
+              <a:t>$18,000</a:t>
+            </a:r>
+          </a:p>
+        </p:txBody>
+      </p:sp>
+      <p:sp>
+        <p:nvSpPr>
+          <p:cNvPr id="84" name="TextBox 83"/>
           <p:cNvSpPr txBox="1"/>
           <p:nvPr/>
         </p:nvSpPr>
         <p:spPr>
           <a:xfrm>
-            <a:off x="9281160" y="3863339"/>
-            <a:ext cx="1831543" cy="274320"/>
+            <a:off x="8878824" y="4032504"/>
+            <a:ext cx="2233879" cy="274320"/>
           </a:xfrm>
           <a:prstGeom prst="rect">
             <a:avLst/>
@@ -33673,20 +33767,20 @@
                 </a:solidFill>
                 <a:latin typeface="IBM Plex Mono"/>
               </a:rPr>
-              <a:t>annual spend each</a:t>
-            </a:r>
-          </a:p>
-        </p:txBody>
-      </p:sp>
-      <p:sp>
-        <p:nvSpPr>
-          <p:cNvPr id="84" name="TextBox 83"/>
+              <a:t>spend each</a:t>
+            </a:r>
+          </a:p>
+        </p:txBody>
+      </p:sp>
+      <p:sp>
+        <p:nvSpPr>
+          <p:cNvPr id="85" name="TextBox 84"/>
           <p:cNvSpPr txBox="1"/>
           <p:nvPr/>
         </p:nvSpPr>
         <p:spPr>
           <a:xfrm>
-            <a:off x="7525512" y="4288536"/>
+            <a:off x="7525512" y="4434840"/>
             <a:ext cx="274320" cy="274320"/>
           </a:xfrm>
           <a:prstGeom prst="rect">
@@ -33719,14 +33813,14 @@
       </p:sp>
       <p:sp>
         <p:nvSpPr>
-          <p:cNvPr id="85" name="Rectangle 84"/>
+          <p:cNvPr id="86" name="Rectangle 85"/>
           <p:cNvSpPr/>
           <p:nvPr/>
         </p:nvSpPr>
         <p:spPr>
           <a:xfrm>
-            <a:off x="7836408" y="4251960"/>
-            <a:ext cx="1353312" cy="310896"/>
+            <a:off x="7836408" y="4398264"/>
+            <a:ext cx="932688" cy="292608"/>
           </a:xfrm>
           <a:prstGeom prst="rect">
             <a:avLst/>
@@ -33750,14 +33844,14 @@
       </p:sp>
       <p:sp>
         <p:nvSpPr>
-          <p:cNvPr id="86" name="TextBox 85"/>
+          <p:cNvPr id="87" name="TextBox 86"/>
           <p:cNvSpPr txBox="1"/>
           <p:nvPr/>
         </p:nvSpPr>
         <p:spPr>
           <a:xfrm>
-            <a:off x="7918704" y="4306824"/>
-            <a:ext cx="1188720" cy="201168"/>
+            <a:off x="7918704" y="4453127"/>
+            <a:ext cx="768096" cy="182880"/>
           </a:xfrm>
           <a:prstGeom prst="rect">
             <a:avLst/>
@@ -33782,21 +33876,21 @@
                 </a:solidFill>
                 <a:latin typeface="IBM Plex Mono"/>
               </a:rPr>
-              <a:t>[ASSUMPTION]</a:t>
-            </a:r>
-          </a:p>
-        </p:txBody>
-      </p:sp>
-      <p:sp>
-        <p:nvSpPr>
-          <p:cNvPr id="87" name="TextBox 86"/>
+              <a:t>45%</a:t>
+            </a:r>
+          </a:p>
+        </p:txBody>
+      </p:sp>
+      <p:sp>
+        <p:nvSpPr>
+          <p:cNvPr id="88" name="TextBox 87"/>
           <p:cNvSpPr txBox="1"/>
           <p:nvPr/>
         </p:nvSpPr>
         <p:spPr>
           <a:xfrm>
-            <a:off x="9281160" y="4293108"/>
-            <a:ext cx="1831543" cy="274320"/>
+            <a:off x="8878824" y="4434840"/>
+            <a:ext cx="2233879" cy="274320"/>
           </a:xfrm>
           <a:prstGeom prst="rect">
             <a:avLst/>
@@ -33821,20 +33915,20 @@
                 </a:solidFill>
                 <a:latin typeface="IBM Plex Mono"/>
               </a:rPr>
-              <a:t>connected-ERP share</a:t>
-            </a:r>
-          </a:p>
-        </p:txBody>
-      </p:sp>
-      <p:sp>
-        <p:nvSpPr>
-          <p:cNvPr id="88" name="TextBox 87"/>
+              <a:t>on connected ERP</a:t>
+            </a:r>
+          </a:p>
+        </p:txBody>
+      </p:sp>
+      <p:sp>
+        <p:nvSpPr>
+          <p:cNvPr id="89" name="TextBox 88"/>
           <p:cNvSpPr txBox="1"/>
           <p:nvPr/>
         </p:nvSpPr>
         <p:spPr>
           <a:xfrm>
-            <a:off x="7525512" y="4718304"/>
+            <a:off x="7525512" y="4837176"/>
             <a:ext cx="274320" cy="274320"/>
           </a:xfrm>
           <a:prstGeom prst="rect">
@@ -33867,14 +33961,14 @@
       </p:sp>
       <p:sp>
         <p:nvSpPr>
-          <p:cNvPr id="89" name="Rectangle 88"/>
+          <p:cNvPr id="90" name="Rectangle 89"/>
           <p:cNvSpPr/>
           <p:nvPr/>
         </p:nvSpPr>
         <p:spPr>
           <a:xfrm>
-            <a:off x="7836408" y="4681728"/>
-            <a:ext cx="1353312" cy="310896"/>
+            <a:off x="7836408" y="4800600"/>
+            <a:ext cx="932688" cy="292608"/>
           </a:xfrm>
           <a:prstGeom prst="rect">
             <a:avLst/>
@@ -33898,14 +33992,14 @@
       </p:sp>
       <p:sp>
         <p:nvSpPr>
-          <p:cNvPr id="90" name="TextBox 89"/>
+          <p:cNvPr id="91" name="TextBox 90"/>
           <p:cNvSpPr txBox="1"/>
           <p:nvPr/>
         </p:nvSpPr>
         <p:spPr>
           <a:xfrm>
-            <a:off x="7918704" y="4736592"/>
-            <a:ext cx="1188720" cy="201168"/>
+            <a:off x="7918704" y="4855464"/>
+            <a:ext cx="768096" cy="182880"/>
           </a:xfrm>
           <a:prstGeom prst="rect">
             <a:avLst/>
@@ -33930,21 +34024,21 @@
                 </a:solidFill>
                 <a:latin typeface="IBM Plex Mono"/>
               </a:rPr>
-              <a:t>[ASSUMPTION]</a:t>
-            </a:r>
-          </a:p>
-        </p:txBody>
-      </p:sp>
-      <p:sp>
-        <p:nvSpPr>
-          <p:cNvPr id="91" name="TextBox 90"/>
+              <a:t>3%</a:t>
+            </a:r>
+          </a:p>
+        </p:txBody>
+      </p:sp>
+      <p:sp>
+        <p:nvSpPr>
+          <p:cNvPr id="92" name="TextBox 91"/>
           <p:cNvSpPr txBox="1"/>
           <p:nvPr/>
         </p:nvSpPr>
         <p:spPr>
           <a:xfrm>
-            <a:off x="9281160" y="4722876"/>
-            <a:ext cx="1831543" cy="274320"/>
+            <a:off x="8878824" y="4837176"/>
+            <a:ext cx="2233879" cy="274320"/>
           </a:xfrm>
           <a:prstGeom prst="rect">
             <a:avLst/>
@@ -33969,7 +34063,7 @@
                 </a:solidFill>
                 <a:latin typeface="IBM Plex Mono"/>
               </a:rPr>
-              <a:t>reachable in three years</a:t>
+              <a:t>reachable, three years</a:t>
             </a:r>
           </a:p>
         </p:txBody>
